--- a/assets/figures-editable/c3-c4/c4-e38.pptx
+++ b/assets/figures-editable/c3-c4/c4-e38.pptx
@@ -3104,8 +3104,8 @@
         </p:nvSpPr>
         <p:spPr>
           <a:xfrm>
-            <a:off x="274320" y="137160"/>
-            <a:ext cx="11612880" cy="365760"/>
+            <a:off x="274320" y="118872"/>
+            <a:ext cx="11612880" cy="340105"/>
           </a:xfrm>
           <a:prstGeom prst="rect">
             <a:avLst/>
@@ -3114,7 +3114,7 @@
           <a:effectLst/>
         </p:spPr>
         <p:txBody>
-          <a:bodyPr wrap="square" lIns="27432" rIns="27432" tIns="18288" bIns="18288" anchor="ctr">
+          <a:bodyPr wrap="none" lIns="18288" rIns="18288" tIns="18288" bIns="18288" anchor="t">
             <a:spAutoFit/>
           </a:bodyPr>
           <a:lstStyle/>
@@ -3125,7 +3125,7 @@
               </a:spcAft>
             </a:pPr>
             <a:r>
-              <a:rPr sz="2100" b="0" i="0">
+              <a:rPr sz="1900" b="1" i="0">
                 <a:solidFill>
                   <a:srgbClr val="8EDBD4"/>
                 </a:solidFill>
@@ -3138,48 +3138,44 @@
       </p:sp>
       <p:cxnSp>
         <p:nvCxnSpPr>
-          <p:cNvPr id="3" name="C4-E38 arrow 1" descr="sci-ppt:o001"/>
+          <p:cNvPr id="3" name="C4-E38 line 1" descr="sci-ppt:o001"/>
           <p:cNvCxnSpPr/>
           <p:nvPr/>
         </p:nvCxnSpPr>
         <p:spPr>
           <a:xfrm>
-            <a:off x="1005840" y="3246120"/>
-            <a:ext cx="9875520" cy="0"/>
+            <a:off x="914400" y="4846320"/>
+            <a:ext cx="4754880" cy="0"/>
           </a:xfrm>
           <a:prstGeom prst="line">
             <a:avLst/>
           </a:prstGeom>
-          <a:ln w="25400">
+          <a:ln w="19050">
             <a:solidFill>
-              <a:srgbClr val="8EDBD4"/>
+              <a:srgbClr val="B4C7D2"/>
             </a:solidFill>
-            <a:headEnd type="none" w="med" len="med"/>
-            <a:tailEnd type="triangle" w="med" len="med"/>
           </a:ln>
           <a:effectLst/>
         </p:spPr>
       </p:cxnSp>
       <p:cxnSp>
         <p:nvCxnSpPr>
-          <p:cNvPr id="4" name="C4-E38 arrow 2" descr="sci-ppt:o002"/>
+          <p:cNvPr id="4" name="C4-E38 line 2" descr="sci-ppt:o002"/>
           <p:cNvCxnSpPr/>
           <p:nvPr/>
         </p:nvCxnSpPr>
         <p:spPr>
-          <a:xfrm flipV="1">
-            <a:off x="1097280" y="822960"/>
-            <a:ext cx="0" cy="2468880"/>
+          <a:xfrm>
+            <a:off x="914400" y="1371600"/>
+            <a:ext cx="0" cy="3474720"/>
           </a:xfrm>
           <a:prstGeom prst="line">
             <a:avLst/>
           </a:prstGeom>
-          <a:ln w="25400">
+          <a:ln w="19050">
             <a:solidFill>
-              <a:srgbClr val="8EDBD4"/>
+              <a:srgbClr val="B4C7D2"/>
             </a:solidFill>
-            <a:headEnd type="none" w="med" len="med"/>
-            <a:tailEnd type="triangle" w="med" len="med"/>
           </a:ln>
           <a:effectLst/>
         </p:spPr>
@@ -3191,16 +3187,16 @@
           <p:nvPr/>
         </p:nvCxnSpPr>
         <p:spPr>
-          <a:xfrm flipV="1">
-            <a:off x="1097280" y="1143000"/>
-            <a:ext cx="2560320" cy="2103120"/>
+          <a:xfrm>
+            <a:off x="914400" y="4846320"/>
+            <a:ext cx="0" cy="64008"/>
           </a:xfrm>
           <a:prstGeom prst="line">
             <a:avLst/>
           </a:prstGeom>
-          <a:ln w="25400">
+          <a:ln w="12700">
             <a:solidFill>
-              <a:srgbClr val="8EDBD4"/>
+              <a:srgbClr val="B4C7D2"/>
             </a:solidFill>
           </a:ln>
           <a:effectLst/>
@@ -3214,15 +3210,77 @@
         </p:nvCxnSpPr>
         <p:spPr>
           <a:xfrm>
-            <a:off x="3657600" y="1143000"/>
-            <a:ext cx="6217920" cy="2103120"/>
+            <a:off x="914400" y="1371600"/>
+            <a:ext cx="0" cy="3474720"/>
           </a:xfrm>
           <a:prstGeom prst="line">
             <a:avLst/>
           </a:prstGeom>
-          <a:ln w="25400">
+          <a:ln w="7620">
             <a:solidFill>
-              <a:srgbClr val="8EDBD4"/>
+              <a:srgbClr val="2E4756"/>
+            </a:solidFill>
+          </a:ln>
+          <a:effectLst/>
+        </p:spPr>
+      </p:cxnSp>
+      <p:sp>
+        <p:nvSpPr>
+          <p:cNvPr id="7" name="C4-E38 text 5" descr="sci-ppt:o005"/>
+          <p:cNvSpPr txBox="1"/>
+          <p:nvPr/>
+        </p:nvSpPr>
+        <p:spPr>
+          <a:xfrm>
+            <a:off x="457200" y="4928616"/>
+            <a:ext cx="914400" cy="208407"/>
+          </a:xfrm>
+          <a:prstGeom prst="rect">
+            <a:avLst/>
+          </a:prstGeom>
+          <a:noFill/>
+          <a:effectLst/>
+        </p:spPr>
+        <p:txBody>
+          <a:bodyPr wrap="none" lIns="18288" rIns="18288" tIns="18288" bIns="18288" anchor="t">
+            <a:spAutoFit/>
+          </a:bodyPr>
+          <a:lstStyle/>
+          <a:p>
+            <a:pPr algn="ctr">
+              <a:spcAft>
+                <a:spcPts val="0"/>
+              </a:spcAft>
+            </a:pPr>
+            <a:r>
+              <a:rPr sz="1050" b="0" i="0">
+                <a:solidFill>
+                  <a:srgbClr val="B4C7D2"/>
+                </a:solidFill>
+                <a:latin typeface="Arial"/>
+              </a:rPr>
+              <a:t>0</a:t>
+            </a:r>
+          </a:p>
+        </p:txBody>
+      </p:sp>
+      <p:cxnSp>
+        <p:nvCxnSpPr>
+          <p:cNvPr id="8" name="C4-E38 line 6" descr="sci-ppt:o006"/>
+          <p:cNvCxnSpPr/>
+          <p:nvPr/>
+        </p:nvCxnSpPr>
+        <p:spPr>
+          <a:xfrm>
+            <a:off x="2612571" y="4846320"/>
+            <a:ext cx="0" cy="64008"/>
+          </a:xfrm>
+          <a:prstGeom prst="line">
+            <a:avLst/>
+          </a:prstGeom>
+          <a:ln w="12700">
+            <a:solidFill>
+              <a:srgbClr val="B4C7D2"/>
             </a:solidFill>
           </a:ln>
           <a:effectLst/>
@@ -3230,19 +3288,81 @@
       </p:cxnSp>
       <p:cxnSp>
         <p:nvCxnSpPr>
-          <p:cNvPr id="7" name="C4-E38 line 5" descr="sci-ppt:o005"/>
+          <p:cNvPr id="9" name="C4-E38 line 7" descr="sci-ppt:o007"/>
           <p:cNvCxnSpPr/>
           <p:nvPr/>
         </p:nvCxnSpPr>
         <p:spPr>
           <a:xfrm>
-            <a:off x="3657600" y="1143000"/>
-            <a:ext cx="0" cy="2103120"/>
+            <a:off x="2612571" y="1371600"/>
+            <a:ext cx="0" cy="3474720"/>
           </a:xfrm>
           <a:prstGeom prst="line">
             <a:avLst/>
           </a:prstGeom>
-          <a:ln w="25400">
+          <a:ln w="7620">
+            <a:solidFill>
+              <a:srgbClr val="2E4756"/>
+            </a:solidFill>
+          </a:ln>
+          <a:effectLst/>
+        </p:spPr>
+      </p:cxnSp>
+      <p:sp>
+        <p:nvSpPr>
+          <p:cNvPr id="10" name="C4-E38 text 8" descr="sci-ppt:o008"/>
+          <p:cNvSpPr txBox="1"/>
+          <p:nvPr/>
+        </p:nvSpPr>
+        <p:spPr>
+          <a:xfrm>
+            <a:off x="2155371" y="4928616"/>
+            <a:ext cx="914400" cy="208407"/>
+          </a:xfrm>
+          <a:prstGeom prst="rect">
+            <a:avLst/>
+          </a:prstGeom>
+          <a:noFill/>
+          <a:effectLst/>
+        </p:spPr>
+        <p:txBody>
+          <a:bodyPr wrap="none" lIns="18288" rIns="18288" tIns="18288" bIns="18288" anchor="t">
+            <a:spAutoFit/>
+          </a:bodyPr>
+          <a:lstStyle/>
+          <a:p>
+            <a:pPr algn="ctr">
+              <a:spcAft>
+                <a:spcPts val="0"/>
+              </a:spcAft>
+            </a:pPr>
+            <a:r>
+              <a:rPr sz="1050" b="0" i="0">
+                <a:solidFill>
+                  <a:srgbClr val="B4C7D2"/>
+                </a:solidFill>
+                <a:latin typeface="Arial"/>
+              </a:rPr>
+              <a:t>50</a:t>
+            </a:r>
+          </a:p>
+        </p:txBody>
+      </p:sp>
+      <p:cxnSp>
+        <p:nvCxnSpPr>
+          <p:cNvPr id="11" name="C4-E38 line 9" descr="sci-ppt:o009"/>
+          <p:cNvCxnSpPr/>
+          <p:nvPr/>
+        </p:nvCxnSpPr>
+        <p:spPr>
+          <a:xfrm>
+            <a:off x="4310742" y="4846320"/>
+            <a:ext cx="0" cy="64008"/>
+          </a:xfrm>
+          <a:prstGeom prst="line">
+            <a:avLst/>
+          </a:prstGeom>
+          <a:ln w="12700">
             <a:solidFill>
               <a:srgbClr val="B4C7D2"/>
             </a:solidFill>
@@ -3250,16 +3370,38 @@
           <a:effectLst/>
         </p:spPr>
       </p:cxnSp>
-      <p:sp>
-        <p:nvSpPr>
-          <p:cNvPr id="8" name="C4-E38 text 6" descr="sci-ppt:o006"/>
+      <p:cxnSp>
+        <p:nvCxnSpPr>
+          <p:cNvPr id="12" name="C4-E38 line 10" descr="sci-ppt:o010"/>
+          <p:cNvCxnSpPr/>
+          <p:nvPr/>
+        </p:nvCxnSpPr>
+        <p:spPr>
+          <a:xfrm>
+            <a:off x="4310742" y="1371600"/>
+            <a:ext cx="0" cy="3474720"/>
+          </a:xfrm>
+          <a:prstGeom prst="line">
+            <a:avLst/>
+          </a:prstGeom>
+          <a:ln w="7620">
+            <a:solidFill>
+              <a:srgbClr val="2E4756"/>
+            </a:solidFill>
+          </a:ln>
+          <a:effectLst/>
+        </p:spPr>
+      </p:cxnSp>
+      <p:sp>
+        <p:nvSpPr>
+          <p:cNvPr id="13" name="C4-E38 text 11" descr="sci-ppt:o011"/>
           <p:cNvSpPr txBox="1"/>
           <p:nvPr/>
         </p:nvSpPr>
         <p:spPr>
           <a:xfrm>
-            <a:off x="320040" y="640080"/>
-            <a:ext cx="2743200" cy="365760"/>
+            <a:off x="3853542" y="4928616"/>
+            <a:ext cx="914400" cy="208407"/>
           </a:xfrm>
           <a:prstGeom prst="rect">
             <a:avLst/>
@@ -3268,268 +3410,50 @@
           <a:effectLst/>
         </p:spPr>
         <p:txBody>
-          <a:bodyPr wrap="square" lIns="27432" rIns="27432" tIns="18288" bIns="18288" anchor="ctr">
+          <a:bodyPr wrap="none" lIns="18288" rIns="18288" tIns="18288" bIns="18288" anchor="t">
             <a:spAutoFit/>
           </a:bodyPr>
           <a:lstStyle/>
           <a:p>
-            <a:pPr algn="l">
+            <a:pPr algn="ctr">
               <a:spcAft>
                 <a:spcPts val="0"/>
               </a:spcAft>
             </a:pPr>
             <a:r>
-              <a:rPr sz="1700" b="0" i="0">
+              <a:rPr sz="1050" b="0" i="0">
                 <a:solidFill>
-                  <a:srgbClr val="E7F0F3"/>
+                  <a:srgbClr val="B4C7D2"/>
                 </a:solidFill>
                 <a:latin typeface="Arial"/>
               </a:rPr>
-              <a:t>t_n: tensile resistance</a:t>
-            </a:r>
-          </a:p>
-        </p:txBody>
-      </p:sp>
-      <p:sp>
-        <p:nvSpPr>
-          <p:cNvPr id="9" name="C4-E38 text 7" descr="sci-ppt:o007"/>
-          <p:cNvSpPr txBox="1"/>
+              <a:t>100</a:t>
+            </a:r>
+          </a:p>
+        </p:txBody>
+      </p:sp>
+      <p:cxnSp>
+        <p:nvCxnSpPr>
+          <p:cNvPr id="14" name="C4-E38 line 12" descr="sci-ppt:o012"/>
+          <p:cNvCxnSpPr/>
           <p:nvPr/>
-        </p:nvSpPr>
+        </p:nvCxnSpPr>
         <p:spPr>
           <a:xfrm>
-            <a:off x="3794760" y="914400"/>
-            <a:ext cx="2743200" cy="365760"/>
+            <a:off x="850392" y="4846320"/>
+            <a:ext cx="64008" cy="0"/>
           </a:xfrm>
-          <a:prstGeom prst="rect">
+          <a:prstGeom prst="line">
             <a:avLst/>
           </a:prstGeom>
-          <a:noFill/>
+          <a:ln w="12700">
+            <a:solidFill>
+              <a:srgbClr val="B4C7D2"/>
+            </a:solidFill>
+          </a:ln>
           <a:effectLst/>
         </p:spPr>
-        <p:txBody>
-          <a:bodyPr wrap="square" lIns="27432" rIns="27432" tIns="18288" bIns="18288" anchor="ctr">
-            <a:spAutoFit/>
-          </a:bodyPr>
-          <a:lstStyle/>
-          <a:p>
-            <a:pPr algn="l">
-              <a:spcAft>
-                <a:spcPts val="0"/>
-              </a:spcAft>
-            </a:pPr>
-            <a:r>
-              <a:rPr sz="1800" b="0" i="0">
-                <a:solidFill>
-                  <a:srgbClr val="E7F0F3"/>
-                </a:solidFill>
-                <a:latin typeface="Arial"/>
-              </a:rPr>
-              <a:t>T_max</a:t>
-            </a:r>
-          </a:p>
-        </p:txBody>
-      </p:sp>
-      <p:sp>
-        <p:nvSpPr>
-          <p:cNvPr id="10" name="C4-E38 text 8" descr="sci-ppt:o008"/>
-          <p:cNvSpPr txBox="1"/>
-          <p:nvPr/>
-        </p:nvSpPr>
-        <p:spPr>
-          <a:xfrm>
-            <a:off x="3337560" y="3429000"/>
-            <a:ext cx="1828800" cy="274320"/>
-          </a:xfrm>
-          <a:prstGeom prst="rect">
-            <a:avLst/>
-          </a:prstGeom>
-          <a:noFill/>
-          <a:effectLst/>
-        </p:spPr>
-        <p:txBody>
-          <a:bodyPr wrap="square" lIns="27432" rIns="27432" tIns="18288" bIns="18288" anchor="ctr">
-            <a:spAutoFit/>
-          </a:bodyPr>
-          <a:lstStyle/>
-          <a:p>
-            <a:pPr algn="l">
-              <a:spcAft>
-                <a:spcPts val="0"/>
-              </a:spcAft>
-            </a:pPr>
-            <a:r>
-              <a:rPr sz="1800" b="0" i="0">
-                <a:solidFill>
-                  <a:srgbClr val="E7F0F3"/>
-                </a:solidFill>
-                <a:latin typeface="Arial"/>
-              </a:rPr>
-              <a:t>δ₀</a:t>
-            </a:r>
-          </a:p>
-        </p:txBody>
-      </p:sp>
-      <p:sp>
-        <p:nvSpPr>
-          <p:cNvPr id="11" name="C4-E38 text 9" descr="sci-ppt:o009"/>
-          <p:cNvSpPr txBox="1"/>
-          <p:nvPr/>
-        </p:nvSpPr>
-        <p:spPr>
-          <a:xfrm>
-            <a:off x="9646920" y="3429000"/>
-            <a:ext cx="1280160" cy="274320"/>
-          </a:xfrm>
-          <a:prstGeom prst="rect">
-            <a:avLst/>
-          </a:prstGeom>
-          <a:noFill/>
-          <a:effectLst/>
-        </p:spPr>
-        <p:txBody>
-          <a:bodyPr wrap="square" lIns="27432" rIns="27432" tIns="18288" bIns="18288" anchor="ctr">
-            <a:spAutoFit/>
-          </a:bodyPr>
-          <a:lstStyle/>
-          <a:p>
-            <a:pPr algn="l">
-              <a:spcAft>
-                <a:spcPts val="0"/>
-              </a:spcAft>
-            </a:pPr>
-            <a:r>
-              <a:rPr sz="1800" b="0" i="0">
-                <a:solidFill>
-                  <a:srgbClr val="E7F0F3"/>
-                </a:solidFill>
-                <a:latin typeface="Arial"/>
-              </a:rPr>
-              <a:t>δ_c</a:t>
-            </a:r>
-          </a:p>
-        </p:txBody>
-      </p:sp>
-      <p:sp>
-        <p:nvSpPr>
-          <p:cNvPr id="12" name="C4-E38 text 10" descr="sci-ppt:o010"/>
-          <p:cNvSpPr txBox="1"/>
-          <p:nvPr/>
-        </p:nvSpPr>
-        <p:spPr>
-          <a:xfrm>
-            <a:off x="10789920" y="3429000"/>
-            <a:ext cx="914400" cy="274320"/>
-          </a:xfrm>
-          <a:prstGeom prst="rect">
-            <a:avLst/>
-          </a:prstGeom>
-          <a:noFill/>
-          <a:effectLst/>
-        </p:spPr>
-        <p:txBody>
-          <a:bodyPr wrap="square" lIns="27432" rIns="27432" tIns="18288" bIns="18288" anchor="ctr">
-            <a:spAutoFit/>
-          </a:bodyPr>
-          <a:lstStyle/>
-          <a:p>
-            <a:pPr algn="l">
-              <a:spcAft>
-                <a:spcPts val="0"/>
-              </a:spcAft>
-            </a:pPr>
-            <a:r>
-              <a:rPr sz="1800" b="0" i="0">
-                <a:solidFill>
-                  <a:srgbClr val="E7F0F3"/>
-                </a:solidFill>
-                <a:latin typeface="Arial"/>
-              </a:rPr>
-              <a:t>δ</a:t>
-            </a:r>
-          </a:p>
-        </p:txBody>
-      </p:sp>
-      <p:sp>
-        <p:nvSpPr>
-          <p:cNvPr id="13" name="C4-E38 text 11" descr="sci-ppt:o011"/>
-          <p:cNvSpPr txBox="1"/>
-          <p:nvPr/>
-        </p:nvSpPr>
-        <p:spPr>
-          <a:xfrm>
-            <a:off x="4754880" y="2377440"/>
-            <a:ext cx="4572000" cy="411480"/>
-          </a:xfrm>
-          <a:prstGeom prst="rect">
-            <a:avLst/>
-          </a:prstGeom>
-          <a:noFill/>
-          <a:effectLst/>
-        </p:spPr>
-        <p:txBody>
-          <a:bodyPr wrap="square" lIns="27432" rIns="27432" tIns="18288" bIns="18288" anchor="ctr">
-            <a:spAutoFit/>
-          </a:bodyPr>
-          <a:lstStyle/>
-          <a:p>
-            <a:pPr algn="l">
-              <a:spcAft>
-                <a:spcPts val="0"/>
-              </a:spcAft>
-            </a:pPr>
-            <a:r>
-              <a:rPr sz="2000" b="0" i="0">
-                <a:solidFill>
-                  <a:srgbClr val="8EDBD4"/>
-                </a:solidFill>
-                <a:latin typeface="Arial"/>
-              </a:rPr>
-              <a:t>Full area = Γ</a:t>
-            </a:r>
-          </a:p>
-        </p:txBody>
-      </p:sp>
-      <p:sp>
-        <p:nvSpPr>
-          <p:cNvPr id="14" name="C4-E38 text 12" descr="sci-ppt:o012"/>
-          <p:cNvSpPr txBox="1"/>
-          <p:nvPr/>
-        </p:nvSpPr>
-        <p:spPr>
-          <a:xfrm>
-            <a:off x="5943600" y="731520"/>
-            <a:ext cx="4572000" cy="365760"/>
-          </a:xfrm>
-          <a:prstGeom prst="rect">
-            <a:avLst/>
-          </a:prstGeom>
-          <a:noFill/>
-          <a:effectLst/>
-        </p:spPr>
-        <p:txBody>
-          <a:bodyPr wrap="square" lIns="27432" rIns="27432" tIns="18288" bIns="18288" anchor="ctr">
-            <a:spAutoFit/>
-          </a:bodyPr>
-          <a:lstStyle/>
-          <a:p>
-            <a:pPr algn="l">
-              <a:spcAft>
-                <a:spcPts val="0"/>
-              </a:spcAft>
-            </a:pPr>
-            <a:r>
-              <a:rPr sz="1700" b="0" i="0">
-                <a:solidFill>
-                  <a:srgbClr val="E7F0F3"/>
-                </a:solidFill>
-                <a:latin typeface="Arial"/>
-              </a:rPr>
-              <a:t>Monotonic tensile opening branch</a:t>
-            </a:r>
-          </a:p>
-        </p:txBody>
-      </p:sp>
+      </p:cxnSp>
       <p:cxnSp>
         <p:nvCxnSpPr>
           <p:cNvPr id="15" name="C4-E38 line 13" descr="sci-ppt:o013"/>
@@ -3538,30 +3462,52 @@
         </p:nvCxnSpPr>
         <p:spPr>
           <a:xfrm>
-            <a:off x="274320" y="3977639"/>
-            <a:ext cx="11612880" cy="0"/>
+            <a:off x="850392" y="3509889"/>
+            <a:ext cx="64008" cy="0"/>
           </a:xfrm>
           <a:prstGeom prst="line">
             <a:avLst/>
           </a:prstGeom>
           <a:ln w="12700">
             <a:solidFill>
-              <a:srgbClr val="405967"/>
+              <a:srgbClr val="B4C7D2"/>
             </a:solidFill>
           </a:ln>
           <a:effectLst/>
         </p:spPr>
       </p:cxnSp>
-      <p:sp>
-        <p:nvSpPr>
-          <p:cNvPr id="16" name="C4-E38 text 14" descr="sci-ppt:o014"/>
+      <p:cxnSp>
+        <p:nvCxnSpPr>
+          <p:cNvPr id="16" name="C4-E38 line 14" descr="sci-ppt:o014"/>
+          <p:cNvCxnSpPr/>
+          <p:nvPr/>
+        </p:nvCxnSpPr>
+        <p:spPr>
+          <a:xfrm>
+            <a:off x="914400" y="3509889"/>
+            <a:ext cx="4754880" cy="0"/>
+          </a:xfrm>
+          <a:prstGeom prst="line">
+            <a:avLst/>
+          </a:prstGeom>
+          <a:ln w="7620">
+            <a:solidFill>
+              <a:srgbClr val="2E4756"/>
+            </a:solidFill>
+          </a:ln>
+          <a:effectLst/>
+        </p:spPr>
+      </p:cxnSp>
+      <p:sp>
+        <p:nvSpPr>
+          <p:cNvPr id="17" name="C4-E38 text 15" descr="sci-ppt:o015"/>
           <p:cNvSpPr txBox="1"/>
           <p:nvPr/>
         </p:nvSpPr>
         <p:spPr>
           <a:xfrm>
-            <a:off x="320040" y="4096512"/>
-            <a:ext cx="5715000" cy="246888"/>
+            <a:off x="45720" y="3427593"/>
+            <a:ext cx="777240" cy="208407"/>
           </a:xfrm>
           <a:prstGeom prst="rect">
             <a:avLst/>
@@ -3570,38 +3516,82 @@
           <a:effectLst/>
         </p:spPr>
         <p:txBody>
-          <a:bodyPr wrap="square" lIns="27432" rIns="27432" tIns="18288" bIns="18288" anchor="ctr">
+          <a:bodyPr wrap="none" lIns="18288" rIns="18288" tIns="18288" bIns="18288" anchor="t">
             <a:spAutoFit/>
           </a:bodyPr>
           <a:lstStyle/>
           <a:p>
-            <a:pPr algn="l">
+            <a:pPr algn="r">
               <a:spcAft>
                 <a:spcPts val="0"/>
               </a:spcAft>
             </a:pPr>
             <a:r>
-              <a:rPr sz="1150" b="0" i="0">
+              <a:rPr sz="1050" b="0" i="0">
                 <a:solidFill>
                   <a:srgbClr val="B4C7D2"/>
                 </a:solidFill>
                 <a:latin typeface="Arial"/>
               </a:rPr>
-              <a:t>• δ → tensile opening</a:t>
-            </a:r>
-          </a:p>
-        </p:txBody>
-      </p:sp>
-      <p:sp>
-        <p:nvSpPr>
-          <p:cNvPr id="17" name="C4-E38 text 15" descr="sci-ppt:o015"/>
+              <a:t>0.05</a:t>
+            </a:r>
+          </a:p>
+        </p:txBody>
+      </p:sp>
+      <p:cxnSp>
+        <p:nvCxnSpPr>
+          <p:cNvPr id="18" name="C4-E38 line 16" descr="sci-ppt:o016"/>
+          <p:cNvCxnSpPr/>
+          <p:nvPr/>
+        </p:nvCxnSpPr>
+        <p:spPr>
+          <a:xfrm>
+            <a:off x="850392" y="2173458"/>
+            <a:ext cx="64008" cy="0"/>
+          </a:xfrm>
+          <a:prstGeom prst="line">
+            <a:avLst/>
+          </a:prstGeom>
+          <a:ln w="12700">
+            <a:solidFill>
+              <a:srgbClr val="B4C7D2"/>
+            </a:solidFill>
+          </a:ln>
+          <a:effectLst/>
+        </p:spPr>
+      </p:cxnSp>
+      <p:cxnSp>
+        <p:nvCxnSpPr>
+          <p:cNvPr id="19" name="C4-E38 line 17" descr="sci-ppt:o017"/>
+          <p:cNvCxnSpPr/>
+          <p:nvPr/>
+        </p:nvCxnSpPr>
+        <p:spPr>
+          <a:xfrm>
+            <a:off x="914400" y="2173458"/>
+            <a:ext cx="4754880" cy="0"/>
+          </a:xfrm>
+          <a:prstGeom prst="line">
+            <a:avLst/>
+          </a:prstGeom>
+          <a:ln w="7620">
+            <a:solidFill>
+              <a:srgbClr val="2E4756"/>
+            </a:solidFill>
+          </a:ln>
+          <a:effectLst/>
+        </p:spPr>
+      </p:cxnSp>
+      <p:sp>
+        <p:nvSpPr>
+          <p:cNvPr id="20" name="C4-E38 text 18" descr="sci-ppt:o018"/>
           <p:cNvSpPr txBox="1"/>
           <p:nvPr/>
         </p:nvSpPr>
         <p:spPr>
           <a:xfrm>
-            <a:off x="6217920" y="4096512"/>
-            <a:ext cx="5715000" cy="246888"/>
+            <a:off x="45720" y="2091162"/>
+            <a:ext cx="777240" cy="208407"/>
           </a:xfrm>
           <a:prstGeom prst="rect">
             <a:avLst/>
@@ -3610,38 +3600,38 @@
           <a:effectLst/>
         </p:spPr>
         <p:txBody>
-          <a:bodyPr wrap="square" lIns="27432" rIns="27432" tIns="18288" bIns="18288" anchor="ctr">
+          <a:bodyPr wrap="none" lIns="18288" rIns="18288" tIns="18288" bIns="18288" anchor="t">
             <a:spAutoFit/>
           </a:bodyPr>
           <a:lstStyle/>
           <a:p>
-            <a:pPr algn="l">
+            <a:pPr algn="r">
               <a:spcAft>
                 <a:spcPts val="0"/>
               </a:spcAft>
             </a:pPr>
             <a:r>
-              <a:rPr sz="1150" b="0" i="0">
+              <a:rPr sz="1050" b="0" i="0">
                 <a:solidFill>
                   <a:srgbClr val="B4C7D2"/>
                 </a:solidFill>
                 <a:latin typeface="Arial"/>
               </a:rPr>
-              <a:t>• t_n, T_max — strength curve</a:t>
-            </a:r>
-          </a:p>
-        </p:txBody>
-      </p:sp>
-      <p:sp>
-        <p:nvSpPr>
-          <p:cNvPr id="18" name="C4-E38 text 16" descr="sci-ppt:o016"/>
+              <a:t>0.10</a:t>
+            </a:r>
+          </a:p>
+        </p:txBody>
+      </p:sp>
+      <p:sp>
+        <p:nvSpPr>
+          <p:cNvPr id="21" name="C4-E38 text 19" descr="sci-ppt:o019"/>
           <p:cNvSpPr txBox="1"/>
           <p:nvPr/>
         </p:nvSpPr>
         <p:spPr>
           <a:xfrm>
-            <a:off x="320040" y="4329684"/>
-            <a:ext cx="5715000" cy="246888"/>
+            <a:off x="914400" y="5129783"/>
+            <a:ext cx="4754880" cy="231648"/>
           </a:xfrm>
           <a:prstGeom prst="rect">
             <a:avLst/>
@@ -3650,38 +3640,38 @@
           <a:effectLst/>
         </p:spPr>
         <p:txBody>
-          <a:bodyPr wrap="square" lIns="27432" rIns="27432" tIns="18288" bIns="18288" anchor="ctr">
+          <a:bodyPr wrap="none" lIns="18288" rIns="18288" tIns="18288" bIns="18288" anchor="t">
             <a:spAutoFit/>
           </a:bodyPr>
           <a:lstStyle/>
           <a:p>
-            <a:pPr algn="l">
+            <a:pPr algn="ctr">
               <a:spcAft>
                 <a:spcPts val="0"/>
               </a:spcAft>
             </a:pPr>
             <a:r>
-              <a:rPr sz="1150" b="0" i="0">
+              <a:rPr sz="1200" b="0" i="0">
                 <a:solidFill>
-                  <a:srgbClr val="B4C7D2"/>
+                  <a:srgbClr val="E7F0F3"/>
                 </a:solidFill>
                 <a:latin typeface="Arial"/>
               </a:rPr>
-              <a:t>• δ_c — final separation</a:t>
-            </a:r>
-          </a:p>
-        </p:txBody>
-      </p:sp>
-      <p:sp>
-        <p:nvSpPr>
-          <p:cNvPr id="19" name="C4-E38 text 17" descr="sci-ppt:o017"/>
+              <a:t>δ (nm)</a:t>
+            </a:r>
+          </a:p>
+        </p:txBody>
+      </p:sp>
+      <p:sp>
+        <p:nvSpPr>
+          <p:cNvPr id="22" name="C4-E38 text 20" descr="sci-ppt:o020"/>
           <p:cNvSpPr txBox="1"/>
           <p:nvPr/>
         </p:nvSpPr>
         <p:spPr>
           <a:xfrm>
-            <a:off x="6217920" y="4329684"/>
-            <a:ext cx="5715000" cy="246888"/>
+            <a:off x="365760" y="1024128"/>
+            <a:ext cx="4754880" cy="231648"/>
           </a:xfrm>
           <a:prstGeom prst="rect">
             <a:avLst/>
@@ -3690,7 +3680,7 @@
           <a:effectLst/>
         </p:spPr>
         <p:txBody>
-          <a:bodyPr wrap="square" lIns="27432" rIns="27432" tIns="18288" bIns="18288" anchor="ctr">
+          <a:bodyPr wrap="none" lIns="18288" rIns="18288" tIns="18288" bIns="18288" anchor="t">
             <a:spAutoFit/>
           </a:bodyPr>
           <a:lstStyle/>
@@ -3701,27 +3691,3113 @@
               </a:spcAft>
             </a:pPr>
             <a:r>
-              <a:rPr sz="1150" b="0" i="0">
+              <a:rPr sz="1200" b="0" i="0">
                 <a:solidFill>
-                  <a:srgbClr val="B4C7D2"/>
+                  <a:srgbClr val="E7F0F3"/>
                 </a:solidFill>
                 <a:latin typeface="Arial"/>
               </a:rPr>
-              <a:t>• Γ — full curve area</a:t>
-            </a:r>
-          </a:p>
-        </p:txBody>
-      </p:sp>
-      <p:sp>
-        <p:nvSpPr>
-          <p:cNvPr id="20" name="C4-E38 text 18" descr="sci-ppt:o018"/>
+              <a:t>tₙ (MPa)</a:t>
+            </a:r>
+          </a:p>
+        </p:txBody>
+      </p:sp>
+      <p:sp>
+        <p:nvSpPr>
+          <p:cNvPr id="23" name="C4-E38 polygon 21" descr="sci-ppt:o021"/>
+          <p:cNvSpPr/>
+          <p:nvPr/>
+        </p:nvSpPr>
+        <p:spPr>
+          <a:xfrm>
+            <a:off x="914400" y="2178668"/>
+            <a:ext cx="4754880" cy="2667652"/>
+          </a:xfrm>
+          <a:custGeom>
+            <a:avLst/>
+            <a:gdLst/>
+            <a:ahLst/>
+            <a:cxnLst/>
+            <a:rect l="l" t="t" r="r" b="b"/>
+            <a:pathLst>
+              <a:path w="4754880" h="2667652">
+                <a:moveTo>
+                  <a:pt x="0" y="2667652"/>
+                </a:moveTo>
+                <a:lnTo>
+                  <a:pt x="11916" y="2573867"/>
+                </a:lnTo>
+                <a:lnTo>
+                  <a:pt x="23833" y="2480082"/>
+                </a:lnTo>
+                <a:lnTo>
+                  <a:pt x="35750" y="2386298"/>
+                </a:lnTo>
+                <a:lnTo>
+                  <a:pt x="47667" y="2292513"/>
+                </a:lnTo>
+                <a:lnTo>
+                  <a:pt x="59584" y="2198728"/>
+                </a:lnTo>
+                <a:lnTo>
+                  <a:pt x="71501" y="2104944"/>
+                </a:lnTo>
+                <a:lnTo>
+                  <a:pt x="83418" y="2011159"/>
+                </a:lnTo>
+                <a:lnTo>
+                  <a:pt x="95335" y="1917375"/>
+                </a:lnTo>
+                <a:lnTo>
+                  <a:pt x="107252" y="1823590"/>
+                </a:lnTo>
+                <a:lnTo>
+                  <a:pt x="119169" y="1729805"/>
+                </a:lnTo>
+                <a:lnTo>
+                  <a:pt x="131086" y="1636021"/>
+                </a:lnTo>
+                <a:lnTo>
+                  <a:pt x="143003" y="1542236"/>
+                </a:lnTo>
+                <a:lnTo>
+                  <a:pt x="154920" y="1448451"/>
+                </a:lnTo>
+                <a:lnTo>
+                  <a:pt x="166837" y="1354667"/>
+                </a:lnTo>
+                <a:lnTo>
+                  <a:pt x="178754" y="1260882"/>
+                </a:lnTo>
+                <a:lnTo>
+                  <a:pt x="190671" y="1167098"/>
+                </a:lnTo>
+                <a:lnTo>
+                  <a:pt x="202588" y="1073313"/>
+                </a:lnTo>
+                <a:lnTo>
+                  <a:pt x="214505" y="979528"/>
+                </a:lnTo>
+                <a:lnTo>
+                  <a:pt x="226422" y="885744"/>
+                </a:lnTo>
+                <a:lnTo>
+                  <a:pt x="238339" y="791959"/>
+                </a:lnTo>
+                <a:lnTo>
+                  <a:pt x="250256" y="698175"/>
+                </a:lnTo>
+                <a:lnTo>
+                  <a:pt x="262173" y="604390"/>
+                </a:lnTo>
+                <a:lnTo>
+                  <a:pt x="274090" y="510605"/>
+                </a:lnTo>
+                <a:lnTo>
+                  <a:pt x="286007" y="416821"/>
+                </a:lnTo>
+                <a:lnTo>
+                  <a:pt x="297924" y="323036"/>
+                </a:lnTo>
+                <a:lnTo>
+                  <a:pt x="309841" y="229251"/>
+                </a:lnTo>
+                <a:lnTo>
+                  <a:pt x="321758" y="135467"/>
+                </a:lnTo>
+                <a:lnTo>
+                  <a:pt x="333675" y="41682"/>
+                </a:lnTo>
+                <a:lnTo>
+                  <a:pt x="345592" y="0"/>
+                </a:lnTo>
+                <a:lnTo>
+                  <a:pt x="357509" y="10421"/>
+                </a:lnTo>
+                <a:lnTo>
+                  <a:pt x="369426" y="20841"/>
+                </a:lnTo>
+                <a:lnTo>
+                  <a:pt x="381343" y="31262"/>
+                </a:lnTo>
+                <a:lnTo>
+                  <a:pt x="393260" y="41682"/>
+                </a:lnTo>
+                <a:lnTo>
+                  <a:pt x="405177" y="52103"/>
+                </a:lnTo>
+                <a:lnTo>
+                  <a:pt x="417094" y="62523"/>
+                </a:lnTo>
+                <a:lnTo>
+                  <a:pt x="429011" y="72944"/>
+                </a:lnTo>
+                <a:lnTo>
+                  <a:pt x="440928" y="83364"/>
+                </a:lnTo>
+                <a:lnTo>
+                  <a:pt x="452845" y="93785"/>
+                </a:lnTo>
+                <a:lnTo>
+                  <a:pt x="464762" y="104205"/>
+                </a:lnTo>
+                <a:lnTo>
+                  <a:pt x="476679" y="114626"/>
+                </a:lnTo>
+                <a:lnTo>
+                  <a:pt x="488596" y="125046"/>
+                </a:lnTo>
+                <a:lnTo>
+                  <a:pt x="500513" y="135467"/>
+                </a:lnTo>
+                <a:lnTo>
+                  <a:pt x="512430" y="145887"/>
+                </a:lnTo>
+                <a:lnTo>
+                  <a:pt x="524347" y="156308"/>
+                </a:lnTo>
+                <a:lnTo>
+                  <a:pt x="536264" y="166728"/>
+                </a:lnTo>
+                <a:lnTo>
+                  <a:pt x="548181" y="177149"/>
+                </a:lnTo>
+                <a:lnTo>
+                  <a:pt x="560098" y="187569"/>
+                </a:lnTo>
+                <a:lnTo>
+                  <a:pt x="572015" y="197990"/>
+                </a:lnTo>
+                <a:lnTo>
+                  <a:pt x="583932" y="208410"/>
+                </a:lnTo>
+                <a:lnTo>
+                  <a:pt x="595849" y="218831"/>
+                </a:lnTo>
+                <a:lnTo>
+                  <a:pt x="607766" y="229252"/>
+                </a:lnTo>
+                <a:lnTo>
+                  <a:pt x="619683" y="239672"/>
+                </a:lnTo>
+                <a:lnTo>
+                  <a:pt x="631600" y="250093"/>
+                </a:lnTo>
+                <a:lnTo>
+                  <a:pt x="643517" y="260513"/>
+                </a:lnTo>
+                <a:lnTo>
+                  <a:pt x="655434" y="270934"/>
+                </a:lnTo>
+                <a:lnTo>
+                  <a:pt x="667351" y="281354"/>
+                </a:lnTo>
+                <a:lnTo>
+                  <a:pt x="679268" y="291775"/>
+                </a:lnTo>
+                <a:lnTo>
+                  <a:pt x="691185" y="302195"/>
+                </a:lnTo>
+                <a:lnTo>
+                  <a:pt x="703102" y="312616"/>
+                </a:lnTo>
+                <a:lnTo>
+                  <a:pt x="715019" y="323036"/>
+                </a:lnTo>
+                <a:lnTo>
+                  <a:pt x="726936" y="333457"/>
+                </a:lnTo>
+                <a:lnTo>
+                  <a:pt x="738853" y="343877"/>
+                </a:lnTo>
+                <a:lnTo>
+                  <a:pt x="750770" y="354298"/>
+                </a:lnTo>
+                <a:lnTo>
+                  <a:pt x="762687" y="364718"/>
+                </a:lnTo>
+                <a:lnTo>
+                  <a:pt x="774604" y="375139"/>
+                </a:lnTo>
+                <a:lnTo>
+                  <a:pt x="786521" y="385559"/>
+                </a:lnTo>
+                <a:lnTo>
+                  <a:pt x="798438" y="395980"/>
+                </a:lnTo>
+                <a:lnTo>
+                  <a:pt x="810355" y="406400"/>
+                </a:lnTo>
+                <a:lnTo>
+                  <a:pt x="822272" y="416821"/>
+                </a:lnTo>
+                <a:lnTo>
+                  <a:pt x="834189" y="427241"/>
+                </a:lnTo>
+                <a:lnTo>
+                  <a:pt x="846106" y="437662"/>
+                </a:lnTo>
+                <a:lnTo>
+                  <a:pt x="858023" y="448082"/>
+                </a:lnTo>
+                <a:lnTo>
+                  <a:pt x="869940" y="458503"/>
+                </a:lnTo>
+                <a:lnTo>
+                  <a:pt x="881857" y="468923"/>
+                </a:lnTo>
+                <a:lnTo>
+                  <a:pt x="893774" y="479344"/>
+                </a:lnTo>
+                <a:lnTo>
+                  <a:pt x="905691" y="489764"/>
+                </a:lnTo>
+                <a:lnTo>
+                  <a:pt x="917608" y="500185"/>
+                </a:lnTo>
+                <a:lnTo>
+                  <a:pt x="929525" y="510605"/>
+                </a:lnTo>
+                <a:lnTo>
+                  <a:pt x="941442" y="521026"/>
+                </a:lnTo>
+                <a:lnTo>
+                  <a:pt x="953359" y="531446"/>
+                </a:lnTo>
+                <a:lnTo>
+                  <a:pt x="965276" y="541867"/>
+                </a:lnTo>
+                <a:lnTo>
+                  <a:pt x="977193" y="552287"/>
+                </a:lnTo>
+                <a:lnTo>
+                  <a:pt x="989110" y="562708"/>
+                </a:lnTo>
+                <a:lnTo>
+                  <a:pt x="1001027" y="573128"/>
+                </a:lnTo>
+                <a:lnTo>
+                  <a:pt x="1012944" y="583549"/>
+                </a:lnTo>
+                <a:lnTo>
+                  <a:pt x="1024861" y="593969"/>
+                </a:lnTo>
+                <a:lnTo>
+                  <a:pt x="1036778" y="604390"/>
+                </a:lnTo>
+                <a:lnTo>
+                  <a:pt x="1048695" y="614810"/>
+                </a:lnTo>
+                <a:lnTo>
+                  <a:pt x="1060612" y="625231"/>
+                </a:lnTo>
+                <a:lnTo>
+                  <a:pt x="1072529" y="635651"/>
+                </a:lnTo>
+                <a:lnTo>
+                  <a:pt x="1084446" y="646072"/>
+                </a:lnTo>
+                <a:lnTo>
+                  <a:pt x="1096363" y="656493"/>
+                </a:lnTo>
+                <a:lnTo>
+                  <a:pt x="1108280" y="666913"/>
+                </a:lnTo>
+                <a:lnTo>
+                  <a:pt x="1120197" y="677334"/>
+                </a:lnTo>
+                <a:lnTo>
+                  <a:pt x="1132114" y="687754"/>
+                </a:lnTo>
+                <a:lnTo>
+                  <a:pt x="1144031" y="698175"/>
+                </a:lnTo>
+                <a:lnTo>
+                  <a:pt x="1155948" y="708595"/>
+                </a:lnTo>
+                <a:lnTo>
+                  <a:pt x="1167865" y="719016"/>
+                </a:lnTo>
+                <a:lnTo>
+                  <a:pt x="1179782" y="729436"/>
+                </a:lnTo>
+                <a:lnTo>
+                  <a:pt x="1191699" y="739857"/>
+                </a:lnTo>
+                <a:lnTo>
+                  <a:pt x="1203616" y="750277"/>
+                </a:lnTo>
+                <a:lnTo>
+                  <a:pt x="1215533" y="760698"/>
+                </a:lnTo>
+                <a:lnTo>
+                  <a:pt x="1227450" y="771118"/>
+                </a:lnTo>
+                <a:lnTo>
+                  <a:pt x="1239367" y="781539"/>
+                </a:lnTo>
+                <a:lnTo>
+                  <a:pt x="1251284" y="791959"/>
+                </a:lnTo>
+                <a:lnTo>
+                  <a:pt x="1263201" y="802380"/>
+                </a:lnTo>
+                <a:lnTo>
+                  <a:pt x="1275118" y="812800"/>
+                </a:lnTo>
+                <a:lnTo>
+                  <a:pt x="1287035" y="823221"/>
+                </a:lnTo>
+                <a:lnTo>
+                  <a:pt x="1298952" y="833641"/>
+                </a:lnTo>
+                <a:lnTo>
+                  <a:pt x="1310869" y="844062"/>
+                </a:lnTo>
+                <a:lnTo>
+                  <a:pt x="1322786" y="854482"/>
+                </a:lnTo>
+                <a:lnTo>
+                  <a:pt x="1334703" y="864903"/>
+                </a:lnTo>
+                <a:lnTo>
+                  <a:pt x="1346620" y="875323"/>
+                </a:lnTo>
+                <a:lnTo>
+                  <a:pt x="1358537" y="885744"/>
+                </a:lnTo>
+                <a:lnTo>
+                  <a:pt x="1370454" y="896164"/>
+                </a:lnTo>
+                <a:lnTo>
+                  <a:pt x="1382371" y="906585"/>
+                </a:lnTo>
+                <a:lnTo>
+                  <a:pt x="1394288" y="917005"/>
+                </a:lnTo>
+                <a:lnTo>
+                  <a:pt x="1406205" y="927426"/>
+                </a:lnTo>
+                <a:lnTo>
+                  <a:pt x="1418122" y="937846"/>
+                </a:lnTo>
+                <a:lnTo>
+                  <a:pt x="1430039" y="948267"/>
+                </a:lnTo>
+                <a:lnTo>
+                  <a:pt x="1441956" y="958687"/>
+                </a:lnTo>
+                <a:lnTo>
+                  <a:pt x="1453873" y="969108"/>
+                </a:lnTo>
+                <a:lnTo>
+                  <a:pt x="1465790" y="979528"/>
+                </a:lnTo>
+                <a:lnTo>
+                  <a:pt x="1477707" y="989949"/>
+                </a:lnTo>
+                <a:lnTo>
+                  <a:pt x="1489624" y="1000369"/>
+                </a:lnTo>
+                <a:lnTo>
+                  <a:pt x="1501541" y="1010790"/>
+                </a:lnTo>
+                <a:lnTo>
+                  <a:pt x="1513458" y="1021210"/>
+                </a:lnTo>
+                <a:lnTo>
+                  <a:pt x="1525375" y="1031631"/>
+                </a:lnTo>
+                <a:lnTo>
+                  <a:pt x="1537292" y="1042052"/>
+                </a:lnTo>
+                <a:lnTo>
+                  <a:pt x="1549209" y="1052472"/>
+                </a:lnTo>
+                <a:lnTo>
+                  <a:pt x="1561126" y="1062893"/>
+                </a:lnTo>
+                <a:lnTo>
+                  <a:pt x="1573043" y="1073313"/>
+                </a:lnTo>
+                <a:lnTo>
+                  <a:pt x="1584960" y="1083734"/>
+                </a:lnTo>
+                <a:lnTo>
+                  <a:pt x="1596876" y="1094154"/>
+                </a:lnTo>
+                <a:lnTo>
+                  <a:pt x="1608793" y="1104575"/>
+                </a:lnTo>
+                <a:lnTo>
+                  <a:pt x="1620710" y="1114995"/>
+                </a:lnTo>
+                <a:lnTo>
+                  <a:pt x="1632627" y="1125416"/>
+                </a:lnTo>
+                <a:lnTo>
+                  <a:pt x="1644544" y="1135836"/>
+                </a:lnTo>
+                <a:lnTo>
+                  <a:pt x="1656461" y="1146257"/>
+                </a:lnTo>
+                <a:lnTo>
+                  <a:pt x="1668378" y="1156677"/>
+                </a:lnTo>
+                <a:lnTo>
+                  <a:pt x="1680295" y="1167098"/>
+                </a:lnTo>
+                <a:lnTo>
+                  <a:pt x="1692212" y="1177518"/>
+                </a:lnTo>
+                <a:lnTo>
+                  <a:pt x="1704129" y="1187939"/>
+                </a:lnTo>
+                <a:lnTo>
+                  <a:pt x="1716046" y="1198359"/>
+                </a:lnTo>
+                <a:lnTo>
+                  <a:pt x="1727963" y="1208780"/>
+                </a:lnTo>
+                <a:lnTo>
+                  <a:pt x="1739880" y="1219200"/>
+                </a:lnTo>
+                <a:lnTo>
+                  <a:pt x="1751797" y="1229621"/>
+                </a:lnTo>
+                <a:lnTo>
+                  <a:pt x="1763714" y="1240041"/>
+                </a:lnTo>
+                <a:lnTo>
+                  <a:pt x="1775631" y="1250462"/>
+                </a:lnTo>
+                <a:lnTo>
+                  <a:pt x="1787548" y="1260882"/>
+                </a:lnTo>
+                <a:lnTo>
+                  <a:pt x="1799465" y="1271303"/>
+                </a:lnTo>
+                <a:lnTo>
+                  <a:pt x="1811382" y="1281723"/>
+                </a:lnTo>
+                <a:lnTo>
+                  <a:pt x="1823299" y="1292144"/>
+                </a:lnTo>
+                <a:lnTo>
+                  <a:pt x="1835216" y="1302564"/>
+                </a:lnTo>
+                <a:lnTo>
+                  <a:pt x="1847133" y="1312985"/>
+                </a:lnTo>
+                <a:lnTo>
+                  <a:pt x="1859050" y="1323405"/>
+                </a:lnTo>
+                <a:lnTo>
+                  <a:pt x="1870967" y="1333826"/>
+                </a:lnTo>
+                <a:lnTo>
+                  <a:pt x="1882884" y="1344246"/>
+                </a:lnTo>
+                <a:lnTo>
+                  <a:pt x="1894801" y="1354667"/>
+                </a:lnTo>
+                <a:lnTo>
+                  <a:pt x="1906718" y="1365087"/>
+                </a:lnTo>
+                <a:lnTo>
+                  <a:pt x="1918635" y="1375508"/>
+                </a:lnTo>
+                <a:lnTo>
+                  <a:pt x="1930552" y="1385928"/>
+                </a:lnTo>
+                <a:lnTo>
+                  <a:pt x="1942469" y="1396349"/>
+                </a:lnTo>
+                <a:lnTo>
+                  <a:pt x="1954386" y="1406769"/>
+                </a:lnTo>
+                <a:lnTo>
+                  <a:pt x="1966303" y="1417190"/>
+                </a:lnTo>
+                <a:lnTo>
+                  <a:pt x="1978220" y="1427610"/>
+                </a:lnTo>
+                <a:lnTo>
+                  <a:pt x="1990137" y="1438031"/>
+                </a:lnTo>
+                <a:lnTo>
+                  <a:pt x="2002054" y="1448452"/>
+                </a:lnTo>
+                <a:lnTo>
+                  <a:pt x="2013971" y="1458872"/>
+                </a:lnTo>
+                <a:lnTo>
+                  <a:pt x="2025888" y="1469293"/>
+                </a:lnTo>
+                <a:lnTo>
+                  <a:pt x="2037805" y="1479713"/>
+                </a:lnTo>
+                <a:lnTo>
+                  <a:pt x="2049722" y="1490134"/>
+                </a:lnTo>
+                <a:lnTo>
+                  <a:pt x="2061639" y="1500554"/>
+                </a:lnTo>
+                <a:lnTo>
+                  <a:pt x="2073556" y="1510975"/>
+                </a:lnTo>
+                <a:lnTo>
+                  <a:pt x="2085473" y="1521395"/>
+                </a:lnTo>
+                <a:lnTo>
+                  <a:pt x="2097390" y="1531816"/>
+                </a:lnTo>
+                <a:lnTo>
+                  <a:pt x="2109307" y="1542236"/>
+                </a:lnTo>
+                <a:lnTo>
+                  <a:pt x="2121224" y="1552657"/>
+                </a:lnTo>
+                <a:lnTo>
+                  <a:pt x="2133141" y="1563077"/>
+                </a:lnTo>
+                <a:lnTo>
+                  <a:pt x="2145058" y="1573498"/>
+                </a:lnTo>
+                <a:lnTo>
+                  <a:pt x="2156975" y="1583918"/>
+                </a:lnTo>
+                <a:lnTo>
+                  <a:pt x="2168892" y="1594339"/>
+                </a:lnTo>
+                <a:lnTo>
+                  <a:pt x="2180809" y="1604759"/>
+                </a:lnTo>
+                <a:lnTo>
+                  <a:pt x="2192726" y="1615180"/>
+                </a:lnTo>
+                <a:lnTo>
+                  <a:pt x="2204643" y="1625600"/>
+                </a:lnTo>
+                <a:lnTo>
+                  <a:pt x="2216560" y="1636021"/>
+                </a:lnTo>
+                <a:lnTo>
+                  <a:pt x="2228477" y="1646441"/>
+                </a:lnTo>
+                <a:lnTo>
+                  <a:pt x="2240394" y="1656862"/>
+                </a:lnTo>
+                <a:lnTo>
+                  <a:pt x="2252311" y="1667282"/>
+                </a:lnTo>
+                <a:lnTo>
+                  <a:pt x="2264228" y="1677703"/>
+                </a:lnTo>
+                <a:lnTo>
+                  <a:pt x="2276145" y="1688123"/>
+                </a:lnTo>
+                <a:lnTo>
+                  <a:pt x="2288062" y="1698544"/>
+                </a:lnTo>
+                <a:lnTo>
+                  <a:pt x="2299979" y="1708964"/>
+                </a:lnTo>
+                <a:lnTo>
+                  <a:pt x="2311896" y="1719385"/>
+                </a:lnTo>
+                <a:lnTo>
+                  <a:pt x="2323813" y="1729805"/>
+                </a:lnTo>
+                <a:lnTo>
+                  <a:pt x="2335730" y="1740226"/>
+                </a:lnTo>
+                <a:lnTo>
+                  <a:pt x="2347647" y="1750646"/>
+                </a:lnTo>
+                <a:lnTo>
+                  <a:pt x="2359564" y="1761067"/>
+                </a:lnTo>
+                <a:lnTo>
+                  <a:pt x="2371481" y="1771487"/>
+                </a:lnTo>
+                <a:lnTo>
+                  <a:pt x="2383398" y="1781908"/>
+                </a:lnTo>
+                <a:lnTo>
+                  <a:pt x="2395315" y="1792328"/>
+                </a:lnTo>
+                <a:lnTo>
+                  <a:pt x="2407232" y="1802749"/>
+                </a:lnTo>
+                <a:lnTo>
+                  <a:pt x="2419149" y="1813169"/>
+                </a:lnTo>
+                <a:lnTo>
+                  <a:pt x="2431066" y="1823590"/>
+                </a:lnTo>
+                <a:lnTo>
+                  <a:pt x="2442983" y="1834010"/>
+                </a:lnTo>
+                <a:lnTo>
+                  <a:pt x="2454900" y="1844431"/>
+                </a:lnTo>
+                <a:lnTo>
+                  <a:pt x="2466817" y="1854851"/>
+                </a:lnTo>
+                <a:lnTo>
+                  <a:pt x="2478734" y="1865272"/>
+                </a:lnTo>
+                <a:lnTo>
+                  <a:pt x="2490651" y="1875693"/>
+                </a:lnTo>
+                <a:lnTo>
+                  <a:pt x="2502568" y="1886113"/>
+                </a:lnTo>
+                <a:lnTo>
+                  <a:pt x="2514485" y="1896534"/>
+                </a:lnTo>
+                <a:lnTo>
+                  <a:pt x="2526402" y="1906954"/>
+                </a:lnTo>
+                <a:lnTo>
+                  <a:pt x="2538319" y="1917375"/>
+                </a:lnTo>
+                <a:lnTo>
+                  <a:pt x="2550236" y="1927795"/>
+                </a:lnTo>
+                <a:lnTo>
+                  <a:pt x="2562153" y="1938216"/>
+                </a:lnTo>
+                <a:lnTo>
+                  <a:pt x="2574070" y="1948636"/>
+                </a:lnTo>
+                <a:lnTo>
+                  <a:pt x="2585987" y="1959057"/>
+                </a:lnTo>
+                <a:lnTo>
+                  <a:pt x="2597904" y="1969477"/>
+                </a:lnTo>
+                <a:lnTo>
+                  <a:pt x="2609821" y="1979898"/>
+                </a:lnTo>
+                <a:lnTo>
+                  <a:pt x="2621738" y="1990318"/>
+                </a:lnTo>
+                <a:lnTo>
+                  <a:pt x="2633655" y="2000739"/>
+                </a:lnTo>
+                <a:lnTo>
+                  <a:pt x="2645572" y="2011159"/>
+                </a:lnTo>
+                <a:lnTo>
+                  <a:pt x="2657489" y="2021580"/>
+                </a:lnTo>
+                <a:lnTo>
+                  <a:pt x="2669406" y="2032000"/>
+                </a:lnTo>
+                <a:lnTo>
+                  <a:pt x="2681323" y="2042421"/>
+                </a:lnTo>
+                <a:lnTo>
+                  <a:pt x="2693240" y="2052841"/>
+                </a:lnTo>
+                <a:lnTo>
+                  <a:pt x="2705157" y="2063262"/>
+                </a:lnTo>
+                <a:lnTo>
+                  <a:pt x="2717074" y="2073682"/>
+                </a:lnTo>
+                <a:lnTo>
+                  <a:pt x="2728991" y="2084103"/>
+                </a:lnTo>
+                <a:lnTo>
+                  <a:pt x="2740908" y="2094523"/>
+                </a:lnTo>
+                <a:lnTo>
+                  <a:pt x="2752825" y="2104944"/>
+                </a:lnTo>
+                <a:lnTo>
+                  <a:pt x="2764742" y="2115364"/>
+                </a:lnTo>
+                <a:lnTo>
+                  <a:pt x="2776659" y="2125785"/>
+                </a:lnTo>
+                <a:lnTo>
+                  <a:pt x="2788576" y="2136205"/>
+                </a:lnTo>
+                <a:lnTo>
+                  <a:pt x="2800493" y="2146626"/>
+                </a:lnTo>
+                <a:lnTo>
+                  <a:pt x="2812410" y="2157046"/>
+                </a:lnTo>
+                <a:lnTo>
+                  <a:pt x="2824327" y="2167467"/>
+                </a:lnTo>
+                <a:lnTo>
+                  <a:pt x="2836244" y="2177887"/>
+                </a:lnTo>
+                <a:lnTo>
+                  <a:pt x="2848161" y="2188308"/>
+                </a:lnTo>
+                <a:lnTo>
+                  <a:pt x="2860078" y="2198728"/>
+                </a:lnTo>
+                <a:lnTo>
+                  <a:pt x="2871995" y="2209149"/>
+                </a:lnTo>
+                <a:lnTo>
+                  <a:pt x="2883912" y="2219569"/>
+                </a:lnTo>
+                <a:lnTo>
+                  <a:pt x="2895829" y="2229990"/>
+                </a:lnTo>
+                <a:lnTo>
+                  <a:pt x="2907746" y="2240410"/>
+                </a:lnTo>
+                <a:lnTo>
+                  <a:pt x="2919663" y="2250831"/>
+                </a:lnTo>
+                <a:lnTo>
+                  <a:pt x="2931580" y="2261252"/>
+                </a:lnTo>
+                <a:lnTo>
+                  <a:pt x="2943497" y="2271672"/>
+                </a:lnTo>
+                <a:lnTo>
+                  <a:pt x="2955414" y="2282093"/>
+                </a:lnTo>
+                <a:lnTo>
+                  <a:pt x="2967331" y="2292513"/>
+                </a:lnTo>
+                <a:lnTo>
+                  <a:pt x="2979248" y="2302934"/>
+                </a:lnTo>
+                <a:lnTo>
+                  <a:pt x="2991165" y="2313354"/>
+                </a:lnTo>
+                <a:lnTo>
+                  <a:pt x="3003082" y="2323775"/>
+                </a:lnTo>
+                <a:lnTo>
+                  <a:pt x="3014999" y="2334195"/>
+                </a:lnTo>
+                <a:lnTo>
+                  <a:pt x="3026916" y="2344616"/>
+                </a:lnTo>
+                <a:lnTo>
+                  <a:pt x="3038833" y="2355036"/>
+                </a:lnTo>
+                <a:lnTo>
+                  <a:pt x="3050750" y="2365457"/>
+                </a:lnTo>
+                <a:lnTo>
+                  <a:pt x="3062667" y="2375877"/>
+                </a:lnTo>
+                <a:lnTo>
+                  <a:pt x="3074584" y="2386298"/>
+                </a:lnTo>
+                <a:lnTo>
+                  <a:pt x="3086501" y="2396718"/>
+                </a:lnTo>
+                <a:lnTo>
+                  <a:pt x="3098418" y="2407139"/>
+                </a:lnTo>
+                <a:lnTo>
+                  <a:pt x="3110335" y="2417559"/>
+                </a:lnTo>
+                <a:lnTo>
+                  <a:pt x="3122252" y="2427980"/>
+                </a:lnTo>
+                <a:lnTo>
+                  <a:pt x="3134169" y="2438400"/>
+                </a:lnTo>
+                <a:lnTo>
+                  <a:pt x="3146086" y="2448821"/>
+                </a:lnTo>
+                <a:lnTo>
+                  <a:pt x="3158003" y="2459241"/>
+                </a:lnTo>
+                <a:lnTo>
+                  <a:pt x="3169920" y="2469662"/>
+                </a:lnTo>
+                <a:lnTo>
+                  <a:pt x="3181836" y="2480082"/>
+                </a:lnTo>
+                <a:lnTo>
+                  <a:pt x="3193753" y="2490503"/>
+                </a:lnTo>
+                <a:lnTo>
+                  <a:pt x="3205670" y="2500923"/>
+                </a:lnTo>
+                <a:lnTo>
+                  <a:pt x="3217587" y="2511344"/>
+                </a:lnTo>
+                <a:lnTo>
+                  <a:pt x="3229504" y="2521764"/>
+                </a:lnTo>
+                <a:lnTo>
+                  <a:pt x="3241421" y="2532185"/>
+                </a:lnTo>
+                <a:lnTo>
+                  <a:pt x="3253338" y="2542605"/>
+                </a:lnTo>
+                <a:lnTo>
+                  <a:pt x="3265255" y="2553026"/>
+                </a:lnTo>
+                <a:lnTo>
+                  <a:pt x="3277172" y="2563446"/>
+                </a:lnTo>
+                <a:lnTo>
+                  <a:pt x="3289089" y="2573867"/>
+                </a:lnTo>
+                <a:lnTo>
+                  <a:pt x="3301006" y="2584287"/>
+                </a:lnTo>
+                <a:lnTo>
+                  <a:pt x="3312923" y="2594708"/>
+                </a:lnTo>
+                <a:lnTo>
+                  <a:pt x="3324840" y="2605128"/>
+                </a:lnTo>
+                <a:lnTo>
+                  <a:pt x="3336757" y="2615549"/>
+                </a:lnTo>
+                <a:lnTo>
+                  <a:pt x="3348674" y="2625969"/>
+                </a:lnTo>
+                <a:lnTo>
+                  <a:pt x="3360591" y="2636390"/>
+                </a:lnTo>
+                <a:lnTo>
+                  <a:pt x="3372508" y="2646810"/>
+                </a:lnTo>
+                <a:lnTo>
+                  <a:pt x="3384425" y="2657231"/>
+                </a:lnTo>
+                <a:lnTo>
+                  <a:pt x="3396342" y="2667652"/>
+                </a:lnTo>
+                <a:lnTo>
+                  <a:pt x="3408259" y="2667652"/>
+                </a:lnTo>
+                <a:lnTo>
+                  <a:pt x="3420176" y="2667652"/>
+                </a:lnTo>
+                <a:lnTo>
+                  <a:pt x="3432093" y="2667652"/>
+                </a:lnTo>
+                <a:lnTo>
+                  <a:pt x="3444010" y="2667652"/>
+                </a:lnTo>
+                <a:lnTo>
+                  <a:pt x="3455927" y="2667652"/>
+                </a:lnTo>
+                <a:lnTo>
+                  <a:pt x="3467844" y="2667652"/>
+                </a:lnTo>
+                <a:lnTo>
+                  <a:pt x="3479761" y="2667652"/>
+                </a:lnTo>
+                <a:lnTo>
+                  <a:pt x="3491678" y="2667652"/>
+                </a:lnTo>
+                <a:lnTo>
+                  <a:pt x="3503595" y="2667652"/>
+                </a:lnTo>
+                <a:lnTo>
+                  <a:pt x="3515512" y="2667652"/>
+                </a:lnTo>
+                <a:lnTo>
+                  <a:pt x="3527429" y="2667652"/>
+                </a:lnTo>
+                <a:lnTo>
+                  <a:pt x="3539346" y="2667652"/>
+                </a:lnTo>
+                <a:lnTo>
+                  <a:pt x="3551263" y="2667652"/>
+                </a:lnTo>
+                <a:lnTo>
+                  <a:pt x="3563180" y="2667652"/>
+                </a:lnTo>
+                <a:lnTo>
+                  <a:pt x="3575097" y="2667652"/>
+                </a:lnTo>
+                <a:lnTo>
+                  <a:pt x="3587014" y="2667652"/>
+                </a:lnTo>
+                <a:lnTo>
+                  <a:pt x="3598931" y="2667652"/>
+                </a:lnTo>
+                <a:lnTo>
+                  <a:pt x="3610848" y="2667652"/>
+                </a:lnTo>
+                <a:lnTo>
+                  <a:pt x="3622765" y="2667652"/>
+                </a:lnTo>
+                <a:lnTo>
+                  <a:pt x="3634682" y="2667652"/>
+                </a:lnTo>
+                <a:lnTo>
+                  <a:pt x="3646599" y="2667652"/>
+                </a:lnTo>
+                <a:lnTo>
+                  <a:pt x="3658516" y="2667652"/>
+                </a:lnTo>
+                <a:lnTo>
+                  <a:pt x="3670433" y="2667652"/>
+                </a:lnTo>
+                <a:lnTo>
+                  <a:pt x="3682350" y="2667652"/>
+                </a:lnTo>
+                <a:lnTo>
+                  <a:pt x="3694267" y="2667652"/>
+                </a:lnTo>
+                <a:lnTo>
+                  <a:pt x="3706184" y="2667652"/>
+                </a:lnTo>
+                <a:lnTo>
+                  <a:pt x="3718101" y="2667652"/>
+                </a:lnTo>
+                <a:lnTo>
+                  <a:pt x="3730018" y="2667652"/>
+                </a:lnTo>
+                <a:lnTo>
+                  <a:pt x="3741935" y="2667652"/>
+                </a:lnTo>
+                <a:lnTo>
+                  <a:pt x="3753852" y="2667652"/>
+                </a:lnTo>
+                <a:lnTo>
+                  <a:pt x="3765769" y="2667652"/>
+                </a:lnTo>
+                <a:lnTo>
+                  <a:pt x="3777686" y="2667652"/>
+                </a:lnTo>
+                <a:lnTo>
+                  <a:pt x="3789603" y="2667652"/>
+                </a:lnTo>
+                <a:lnTo>
+                  <a:pt x="3801520" y="2667652"/>
+                </a:lnTo>
+                <a:lnTo>
+                  <a:pt x="3813437" y="2667652"/>
+                </a:lnTo>
+                <a:lnTo>
+                  <a:pt x="3825354" y="2667652"/>
+                </a:lnTo>
+                <a:lnTo>
+                  <a:pt x="3837271" y="2667652"/>
+                </a:lnTo>
+                <a:lnTo>
+                  <a:pt x="3849188" y="2667652"/>
+                </a:lnTo>
+                <a:lnTo>
+                  <a:pt x="3861105" y="2667652"/>
+                </a:lnTo>
+                <a:lnTo>
+                  <a:pt x="3873022" y="2667652"/>
+                </a:lnTo>
+                <a:lnTo>
+                  <a:pt x="3884939" y="2667652"/>
+                </a:lnTo>
+                <a:lnTo>
+                  <a:pt x="3896856" y="2667652"/>
+                </a:lnTo>
+                <a:lnTo>
+                  <a:pt x="3908773" y="2667652"/>
+                </a:lnTo>
+                <a:lnTo>
+                  <a:pt x="3920690" y="2667652"/>
+                </a:lnTo>
+                <a:lnTo>
+                  <a:pt x="3932607" y="2667652"/>
+                </a:lnTo>
+                <a:lnTo>
+                  <a:pt x="3944524" y="2667652"/>
+                </a:lnTo>
+                <a:lnTo>
+                  <a:pt x="3956441" y="2667652"/>
+                </a:lnTo>
+                <a:lnTo>
+                  <a:pt x="3968358" y="2667652"/>
+                </a:lnTo>
+                <a:lnTo>
+                  <a:pt x="3980275" y="2667652"/>
+                </a:lnTo>
+                <a:lnTo>
+                  <a:pt x="3992192" y="2667652"/>
+                </a:lnTo>
+                <a:lnTo>
+                  <a:pt x="4004109" y="2667652"/>
+                </a:lnTo>
+                <a:lnTo>
+                  <a:pt x="4016026" y="2667652"/>
+                </a:lnTo>
+                <a:lnTo>
+                  <a:pt x="4027943" y="2667652"/>
+                </a:lnTo>
+                <a:lnTo>
+                  <a:pt x="4039860" y="2667652"/>
+                </a:lnTo>
+                <a:lnTo>
+                  <a:pt x="4051777" y="2667652"/>
+                </a:lnTo>
+                <a:lnTo>
+                  <a:pt x="4063694" y="2667652"/>
+                </a:lnTo>
+                <a:lnTo>
+                  <a:pt x="4075611" y="2667652"/>
+                </a:lnTo>
+                <a:lnTo>
+                  <a:pt x="4087528" y="2667652"/>
+                </a:lnTo>
+                <a:lnTo>
+                  <a:pt x="4099445" y="2667652"/>
+                </a:lnTo>
+                <a:lnTo>
+                  <a:pt x="4111362" y="2667652"/>
+                </a:lnTo>
+                <a:lnTo>
+                  <a:pt x="4123279" y="2667652"/>
+                </a:lnTo>
+                <a:lnTo>
+                  <a:pt x="4135196" y="2667652"/>
+                </a:lnTo>
+                <a:lnTo>
+                  <a:pt x="4147113" y="2667652"/>
+                </a:lnTo>
+                <a:lnTo>
+                  <a:pt x="4159030" y="2667652"/>
+                </a:lnTo>
+                <a:lnTo>
+                  <a:pt x="4170947" y="2667652"/>
+                </a:lnTo>
+                <a:lnTo>
+                  <a:pt x="4182864" y="2667652"/>
+                </a:lnTo>
+                <a:lnTo>
+                  <a:pt x="4194781" y="2667652"/>
+                </a:lnTo>
+                <a:lnTo>
+                  <a:pt x="4206698" y="2667652"/>
+                </a:lnTo>
+                <a:lnTo>
+                  <a:pt x="4218615" y="2667652"/>
+                </a:lnTo>
+                <a:lnTo>
+                  <a:pt x="4230532" y="2667652"/>
+                </a:lnTo>
+                <a:lnTo>
+                  <a:pt x="4242449" y="2667652"/>
+                </a:lnTo>
+                <a:lnTo>
+                  <a:pt x="4254366" y="2667652"/>
+                </a:lnTo>
+                <a:lnTo>
+                  <a:pt x="4266283" y="2667652"/>
+                </a:lnTo>
+                <a:lnTo>
+                  <a:pt x="4278200" y="2667652"/>
+                </a:lnTo>
+                <a:lnTo>
+                  <a:pt x="4290117" y="2667652"/>
+                </a:lnTo>
+                <a:lnTo>
+                  <a:pt x="4302034" y="2667652"/>
+                </a:lnTo>
+                <a:lnTo>
+                  <a:pt x="4313951" y="2667652"/>
+                </a:lnTo>
+                <a:lnTo>
+                  <a:pt x="4325868" y="2667652"/>
+                </a:lnTo>
+                <a:lnTo>
+                  <a:pt x="4337785" y="2667652"/>
+                </a:lnTo>
+                <a:lnTo>
+                  <a:pt x="4349702" y="2667652"/>
+                </a:lnTo>
+                <a:lnTo>
+                  <a:pt x="4361619" y="2667652"/>
+                </a:lnTo>
+                <a:lnTo>
+                  <a:pt x="4373536" y="2667652"/>
+                </a:lnTo>
+                <a:lnTo>
+                  <a:pt x="4385453" y="2667652"/>
+                </a:lnTo>
+                <a:lnTo>
+                  <a:pt x="4397370" y="2667652"/>
+                </a:lnTo>
+                <a:lnTo>
+                  <a:pt x="4409287" y="2667652"/>
+                </a:lnTo>
+                <a:lnTo>
+                  <a:pt x="4421204" y="2667652"/>
+                </a:lnTo>
+                <a:lnTo>
+                  <a:pt x="4433121" y="2667652"/>
+                </a:lnTo>
+                <a:lnTo>
+                  <a:pt x="4445038" y="2667652"/>
+                </a:lnTo>
+                <a:lnTo>
+                  <a:pt x="4456955" y="2667652"/>
+                </a:lnTo>
+                <a:lnTo>
+                  <a:pt x="4468872" y="2667652"/>
+                </a:lnTo>
+                <a:lnTo>
+                  <a:pt x="4480789" y="2667652"/>
+                </a:lnTo>
+                <a:lnTo>
+                  <a:pt x="4492706" y="2667652"/>
+                </a:lnTo>
+                <a:lnTo>
+                  <a:pt x="4504623" y="2667652"/>
+                </a:lnTo>
+                <a:lnTo>
+                  <a:pt x="4516540" y="2667652"/>
+                </a:lnTo>
+                <a:lnTo>
+                  <a:pt x="4528457" y="2667652"/>
+                </a:lnTo>
+                <a:lnTo>
+                  <a:pt x="4540374" y="2667652"/>
+                </a:lnTo>
+                <a:lnTo>
+                  <a:pt x="4552291" y="2667652"/>
+                </a:lnTo>
+                <a:lnTo>
+                  <a:pt x="4564208" y="2667652"/>
+                </a:lnTo>
+                <a:lnTo>
+                  <a:pt x="4576125" y="2667652"/>
+                </a:lnTo>
+                <a:lnTo>
+                  <a:pt x="4588042" y="2667652"/>
+                </a:lnTo>
+                <a:lnTo>
+                  <a:pt x="4599959" y="2667652"/>
+                </a:lnTo>
+                <a:lnTo>
+                  <a:pt x="4611876" y="2667652"/>
+                </a:lnTo>
+                <a:lnTo>
+                  <a:pt x="4623793" y="2667652"/>
+                </a:lnTo>
+                <a:lnTo>
+                  <a:pt x="4635710" y="2667652"/>
+                </a:lnTo>
+                <a:lnTo>
+                  <a:pt x="4647627" y="2667652"/>
+                </a:lnTo>
+                <a:lnTo>
+                  <a:pt x="4659544" y="2667652"/>
+                </a:lnTo>
+                <a:lnTo>
+                  <a:pt x="4671461" y="2667652"/>
+                </a:lnTo>
+                <a:lnTo>
+                  <a:pt x="4683378" y="2667652"/>
+                </a:lnTo>
+                <a:lnTo>
+                  <a:pt x="4695295" y="2667652"/>
+                </a:lnTo>
+                <a:lnTo>
+                  <a:pt x="4707212" y="2667652"/>
+                </a:lnTo>
+                <a:lnTo>
+                  <a:pt x="4719129" y="2667652"/>
+                </a:lnTo>
+                <a:lnTo>
+                  <a:pt x="4731046" y="2667652"/>
+                </a:lnTo>
+                <a:lnTo>
+                  <a:pt x="4742963" y="2667652"/>
+                </a:lnTo>
+                <a:lnTo>
+                  <a:pt x="4754880" y="2667652"/>
+                </a:lnTo>
+                <a:lnTo>
+                  <a:pt x="4754880" y="2667652"/>
+                </a:lnTo>
+                <a:lnTo>
+                  <a:pt x="4742963" y="2667652"/>
+                </a:lnTo>
+                <a:lnTo>
+                  <a:pt x="4731046" y="2667652"/>
+                </a:lnTo>
+                <a:lnTo>
+                  <a:pt x="4719129" y="2667652"/>
+                </a:lnTo>
+                <a:lnTo>
+                  <a:pt x="4707212" y="2667652"/>
+                </a:lnTo>
+                <a:lnTo>
+                  <a:pt x="4695295" y="2667652"/>
+                </a:lnTo>
+                <a:lnTo>
+                  <a:pt x="4683378" y="2667652"/>
+                </a:lnTo>
+                <a:lnTo>
+                  <a:pt x="4671461" y="2667652"/>
+                </a:lnTo>
+                <a:lnTo>
+                  <a:pt x="4659544" y="2667652"/>
+                </a:lnTo>
+                <a:lnTo>
+                  <a:pt x="4647627" y="2667652"/>
+                </a:lnTo>
+                <a:lnTo>
+                  <a:pt x="4635710" y="2667652"/>
+                </a:lnTo>
+                <a:lnTo>
+                  <a:pt x="4623793" y="2667652"/>
+                </a:lnTo>
+                <a:lnTo>
+                  <a:pt x="4611876" y="2667652"/>
+                </a:lnTo>
+                <a:lnTo>
+                  <a:pt x="4599959" y="2667652"/>
+                </a:lnTo>
+                <a:lnTo>
+                  <a:pt x="4588042" y="2667652"/>
+                </a:lnTo>
+                <a:lnTo>
+                  <a:pt x="4576125" y="2667652"/>
+                </a:lnTo>
+                <a:lnTo>
+                  <a:pt x="4564208" y="2667652"/>
+                </a:lnTo>
+                <a:lnTo>
+                  <a:pt x="4552291" y="2667652"/>
+                </a:lnTo>
+                <a:lnTo>
+                  <a:pt x="4540374" y="2667652"/>
+                </a:lnTo>
+                <a:lnTo>
+                  <a:pt x="4528457" y="2667652"/>
+                </a:lnTo>
+                <a:lnTo>
+                  <a:pt x="4516540" y="2667652"/>
+                </a:lnTo>
+                <a:lnTo>
+                  <a:pt x="4504623" y="2667652"/>
+                </a:lnTo>
+                <a:lnTo>
+                  <a:pt x="4492706" y="2667652"/>
+                </a:lnTo>
+                <a:lnTo>
+                  <a:pt x="4480789" y="2667652"/>
+                </a:lnTo>
+                <a:lnTo>
+                  <a:pt x="4468872" y="2667652"/>
+                </a:lnTo>
+                <a:lnTo>
+                  <a:pt x="4456955" y="2667652"/>
+                </a:lnTo>
+                <a:lnTo>
+                  <a:pt x="4445038" y="2667652"/>
+                </a:lnTo>
+                <a:lnTo>
+                  <a:pt x="4433121" y="2667652"/>
+                </a:lnTo>
+                <a:lnTo>
+                  <a:pt x="4421204" y="2667652"/>
+                </a:lnTo>
+                <a:lnTo>
+                  <a:pt x="4409287" y="2667652"/>
+                </a:lnTo>
+                <a:lnTo>
+                  <a:pt x="4397370" y="2667652"/>
+                </a:lnTo>
+                <a:lnTo>
+                  <a:pt x="4385453" y="2667652"/>
+                </a:lnTo>
+                <a:lnTo>
+                  <a:pt x="4373536" y="2667652"/>
+                </a:lnTo>
+                <a:lnTo>
+                  <a:pt x="4361619" y="2667652"/>
+                </a:lnTo>
+                <a:lnTo>
+                  <a:pt x="4349702" y="2667652"/>
+                </a:lnTo>
+                <a:lnTo>
+                  <a:pt x="4337785" y="2667652"/>
+                </a:lnTo>
+                <a:lnTo>
+                  <a:pt x="4325868" y="2667652"/>
+                </a:lnTo>
+                <a:lnTo>
+                  <a:pt x="4313951" y="2667652"/>
+                </a:lnTo>
+                <a:lnTo>
+                  <a:pt x="4302034" y="2667652"/>
+                </a:lnTo>
+                <a:lnTo>
+                  <a:pt x="4290117" y="2667652"/>
+                </a:lnTo>
+                <a:lnTo>
+                  <a:pt x="4278200" y="2667652"/>
+                </a:lnTo>
+                <a:lnTo>
+                  <a:pt x="4266283" y="2667652"/>
+                </a:lnTo>
+                <a:lnTo>
+                  <a:pt x="4254366" y="2667652"/>
+                </a:lnTo>
+                <a:lnTo>
+                  <a:pt x="4242449" y="2667652"/>
+                </a:lnTo>
+                <a:lnTo>
+                  <a:pt x="4230532" y="2667652"/>
+                </a:lnTo>
+                <a:lnTo>
+                  <a:pt x="4218615" y="2667652"/>
+                </a:lnTo>
+                <a:lnTo>
+                  <a:pt x="4206698" y="2667652"/>
+                </a:lnTo>
+                <a:lnTo>
+                  <a:pt x="4194781" y="2667652"/>
+                </a:lnTo>
+                <a:lnTo>
+                  <a:pt x="4182864" y="2667652"/>
+                </a:lnTo>
+                <a:lnTo>
+                  <a:pt x="4170947" y="2667652"/>
+                </a:lnTo>
+                <a:lnTo>
+                  <a:pt x="4159030" y="2667652"/>
+                </a:lnTo>
+                <a:lnTo>
+                  <a:pt x="4147113" y="2667652"/>
+                </a:lnTo>
+                <a:lnTo>
+                  <a:pt x="4135196" y="2667652"/>
+                </a:lnTo>
+                <a:lnTo>
+                  <a:pt x="4123279" y="2667652"/>
+                </a:lnTo>
+                <a:lnTo>
+                  <a:pt x="4111362" y="2667652"/>
+                </a:lnTo>
+                <a:lnTo>
+                  <a:pt x="4099445" y="2667652"/>
+                </a:lnTo>
+                <a:lnTo>
+                  <a:pt x="4087528" y="2667652"/>
+                </a:lnTo>
+                <a:lnTo>
+                  <a:pt x="4075611" y="2667652"/>
+                </a:lnTo>
+                <a:lnTo>
+                  <a:pt x="4063694" y="2667652"/>
+                </a:lnTo>
+                <a:lnTo>
+                  <a:pt x="4051777" y="2667652"/>
+                </a:lnTo>
+                <a:lnTo>
+                  <a:pt x="4039860" y="2667652"/>
+                </a:lnTo>
+                <a:lnTo>
+                  <a:pt x="4027943" y="2667652"/>
+                </a:lnTo>
+                <a:lnTo>
+                  <a:pt x="4016026" y="2667652"/>
+                </a:lnTo>
+                <a:lnTo>
+                  <a:pt x="4004109" y="2667652"/>
+                </a:lnTo>
+                <a:lnTo>
+                  <a:pt x="3992192" y="2667652"/>
+                </a:lnTo>
+                <a:lnTo>
+                  <a:pt x="3980275" y="2667652"/>
+                </a:lnTo>
+                <a:lnTo>
+                  <a:pt x="3968358" y="2667652"/>
+                </a:lnTo>
+                <a:lnTo>
+                  <a:pt x="3956441" y="2667652"/>
+                </a:lnTo>
+                <a:lnTo>
+                  <a:pt x="3944524" y="2667652"/>
+                </a:lnTo>
+                <a:lnTo>
+                  <a:pt x="3932607" y="2667652"/>
+                </a:lnTo>
+                <a:lnTo>
+                  <a:pt x="3920690" y="2667652"/>
+                </a:lnTo>
+                <a:lnTo>
+                  <a:pt x="3908773" y="2667652"/>
+                </a:lnTo>
+                <a:lnTo>
+                  <a:pt x="3896856" y="2667652"/>
+                </a:lnTo>
+                <a:lnTo>
+                  <a:pt x="3884939" y="2667652"/>
+                </a:lnTo>
+                <a:lnTo>
+                  <a:pt x="3873022" y="2667652"/>
+                </a:lnTo>
+                <a:lnTo>
+                  <a:pt x="3861105" y="2667652"/>
+                </a:lnTo>
+                <a:lnTo>
+                  <a:pt x="3849188" y="2667652"/>
+                </a:lnTo>
+                <a:lnTo>
+                  <a:pt x="3837271" y="2667652"/>
+                </a:lnTo>
+                <a:lnTo>
+                  <a:pt x="3825354" y="2667652"/>
+                </a:lnTo>
+                <a:lnTo>
+                  <a:pt x="3813437" y="2667652"/>
+                </a:lnTo>
+                <a:lnTo>
+                  <a:pt x="3801520" y="2667652"/>
+                </a:lnTo>
+                <a:lnTo>
+                  <a:pt x="3789603" y="2667652"/>
+                </a:lnTo>
+                <a:lnTo>
+                  <a:pt x="3777686" y="2667652"/>
+                </a:lnTo>
+                <a:lnTo>
+                  <a:pt x="3765769" y="2667652"/>
+                </a:lnTo>
+                <a:lnTo>
+                  <a:pt x="3753852" y="2667652"/>
+                </a:lnTo>
+                <a:lnTo>
+                  <a:pt x="3741935" y="2667652"/>
+                </a:lnTo>
+                <a:lnTo>
+                  <a:pt x="3730018" y="2667652"/>
+                </a:lnTo>
+                <a:lnTo>
+                  <a:pt x="3718101" y="2667652"/>
+                </a:lnTo>
+                <a:lnTo>
+                  <a:pt x="3706184" y="2667652"/>
+                </a:lnTo>
+                <a:lnTo>
+                  <a:pt x="3694267" y="2667652"/>
+                </a:lnTo>
+                <a:lnTo>
+                  <a:pt x="3682350" y="2667652"/>
+                </a:lnTo>
+                <a:lnTo>
+                  <a:pt x="3670433" y="2667652"/>
+                </a:lnTo>
+                <a:lnTo>
+                  <a:pt x="3658516" y="2667652"/>
+                </a:lnTo>
+                <a:lnTo>
+                  <a:pt x="3646599" y="2667652"/>
+                </a:lnTo>
+                <a:lnTo>
+                  <a:pt x="3634682" y="2667652"/>
+                </a:lnTo>
+                <a:lnTo>
+                  <a:pt x="3622765" y="2667652"/>
+                </a:lnTo>
+                <a:lnTo>
+                  <a:pt x="3610848" y="2667652"/>
+                </a:lnTo>
+                <a:lnTo>
+                  <a:pt x="3598931" y="2667652"/>
+                </a:lnTo>
+                <a:lnTo>
+                  <a:pt x="3587014" y="2667652"/>
+                </a:lnTo>
+                <a:lnTo>
+                  <a:pt x="3575097" y="2667652"/>
+                </a:lnTo>
+                <a:lnTo>
+                  <a:pt x="3563180" y="2667652"/>
+                </a:lnTo>
+                <a:lnTo>
+                  <a:pt x="3551263" y="2667652"/>
+                </a:lnTo>
+                <a:lnTo>
+                  <a:pt x="3539346" y="2667652"/>
+                </a:lnTo>
+                <a:lnTo>
+                  <a:pt x="3527429" y="2667652"/>
+                </a:lnTo>
+                <a:lnTo>
+                  <a:pt x="3515512" y="2667652"/>
+                </a:lnTo>
+                <a:lnTo>
+                  <a:pt x="3503595" y="2667652"/>
+                </a:lnTo>
+                <a:lnTo>
+                  <a:pt x="3491678" y="2667652"/>
+                </a:lnTo>
+                <a:lnTo>
+                  <a:pt x="3479761" y="2667652"/>
+                </a:lnTo>
+                <a:lnTo>
+                  <a:pt x="3467844" y="2667652"/>
+                </a:lnTo>
+                <a:lnTo>
+                  <a:pt x="3455927" y="2667652"/>
+                </a:lnTo>
+                <a:lnTo>
+                  <a:pt x="3444010" y="2667652"/>
+                </a:lnTo>
+                <a:lnTo>
+                  <a:pt x="3432093" y="2667652"/>
+                </a:lnTo>
+                <a:lnTo>
+                  <a:pt x="3420176" y="2667652"/>
+                </a:lnTo>
+                <a:lnTo>
+                  <a:pt x="3408259" y="2667652"/>
+                </a:lnTo>
+                <a:lnTo>
+                  <a:pt x="3396342" y="2667652"/>
+                </a:lnTo>
+                <a:lnTo>
+                  <a:pt x="3384425" y="2667652"/>
+                </a:lnTo>
+                <a:lnTo>
+                  <a:pt x="3372508" y="2667652"/>
+                </a:lnTo>
+                <a:lnTo>
+                  <a:pt x="3360591" y="2667652"/>
+                </a:lnTo>
+                <a:lnTo>
+                  <a:pt x="3348674" y="2667652"/>
+                </a:lnTo>
+                <a:lnTo>
+                  <a:pt x="3336757" y="2667652"/>
+                </a:lnTo>
+                <a:lnTo>
+                  <a:pt x="3324840" y="2667652"/>
+                </a:lnTo>
+                <a:lnTo>
+                  <a:pt x="3312923" y="2667652"/>
+                </a:lnTo>
+                <a:lnTo>
+                  <a:pt x="3301006" y="2667652"/>
+                </a:lnTo>
+                <a:lnTo>
+                  <a:pt x="3289089" y="2667652"/>
+                </a:lnTo>
+                <a:lnTo>
+                  <a:pt x="3277172" y="2667652"/>
+                </a:lnTo>
+                <a:lnTo>
+                  <a:pt x="3265255" y="2667652"/>
+                </a:lnTo>
+                <a:lnTo>
+                  <a:pt x="3253338" y="2667652"/>
+                </a:lnTo>
+                <a:lnTo>
+                  <a:pt x="3241421" y="2667652"/>
+                </a:lnTo>
+                <a:lnTo>
+                  <a:pt x="3229504" y="2667652"/>
+                </a:lnTo>
+                <a:lnTo>
+                  <a:pt x="3217587" y="2667652"/>
+                </a:lnTo>
+                <a:lnTo>
+                  <a:pt x="3205670" y="2667652"/>
+                </a:lnTo>
+                <a:lnTo>
+                  <a:pt x="3193753" y="2667652"/>
+                </a:lnTo>
+                <a:lnTo>
+                  <a:pt x="3181836" y="2667652"/>
+                </a:lnTo>
+                <a:lnTo>
+                  <a:pt x="3169920" y="2667652"/>
+                </a:lnTo>
+                <a:lnTo>
+                  <a:pt x="3158003" y="2667652"/>
+                </a:lnTo>
+                <a:lnTo>
+                  <a:pt x="3146086" y="2667652"/>
+                </a:lnTo>
+                <a:lnTo>
+                  <a:pt x="3134169" y="2667652"/>
+                </a:lnTo>
+                <a:lnTo>
+                  <a:pt x="3122252" y="2667652"/>
+                </a:lnTo>
+                <a:lnTo>
+                  <a:pt x="3110335" y="2667652"/>
+                </a:lnTo>
+                <a:lnTo>
+                  <a:pt x="3098418" y="2667652"/>
+                </a:lnTo>
+                <a:lnTo>
+                  <a:pt x="3086501" y="2667652"/>
+                </a:lnTo>
+                <a:lnTo>
+                  <a:pt x="3074584" y="2667652"/>
+                </a:lnTo>
+                <a:lnTo>
+                  <a:pt x="3062667" y="2667652"/>
+                </a:lnTo>
+                <a:lnTo>
+                  <a:pt x="3050750" y="2667652"/>
+                </a:lnTo>
+                <a:lnTo>
+                  <a:pt x="3038833" y="2667652"/>
+                </a:lnTo>
+                <a:lnTo>
+                  <a:pt x="3026916" y="2667652"/>
+                </a:lnTo>
+                <a:lnTo>
+                  <a:pt x="3014999" y="2667652"/>
+                </a:lnTo>
+                <a:lnTo>
+                  <a:pt x="3003082" y="2667652"/>
+                </a:lnTo>
+                <a:lnTo>
+                  <a:pt x="2991165" y="2667652"/>
+                </a:lnTo>
+                <a:lnTo>
+                  <a:pt x="2979248" y="2667652"/>
+                </a:lnTo>
+                <a:lnTo>
+                  <a:pt x="2967331" y="2667652"/>
+                </a:lnTo>
+                <a:lnTo>
+                  <a:pt x="2955414" y="2667652"/>
+                </a:lnTo>
+                <a:lnTo>
+                  <a:pt x="2943497" y="2667652"/>
+                </a:lnTo>
+                <a:lnTo>
+                  <a:pt x="2931580" y="2667652"/>
+                </a:lnTo>
+                <a:lnTo>
+                  <a:pt x="2919663" y="2667652"/>
+                </a:lnTo>
+                <a:lnTo>
+                  <a:pt x="2907746" y="2667652"/>
+                </a:lnTo>
+                <a:lnTo>
+                  <a:pt x="2895829" y="2667652"/>
+                </a:lnTo>
+                <a:lnTo>
+                  <a:pt x="2883912" y="2667652"/>
+                </a:lnTo>
+                <a:lnTo>
+                  <a:pt x="2871995" y="2667652"/>
+                </a:lnTo>
+                <a:lnTo>
+                  <a:pt x="2860078" y="2667652"/>
+                </a:lnTo>
+                <a:lnTo>
+                  <a:pt x="2848161" y="2667652"/>
+                </a:lnTo>
+                <a:lnTo>
+                  <a:pt x="2836244" y="2667652"/>
+                </a:lnTo>
+                <a:lnTo>
+                  <a:pt x="2824327" y="2667652"/>
+                </a:lnTo>
+                <a:lnTo>
+                  <a:pt x="2812410" y="2667652"/>
+                </a:lnTo>
+                <a:lnTo>
+                  <a:pt x="2800493" y="2667652"/>
+                </a:lnTo>
+                <a:lnTo>
+                  <a:pt x="2788576" y="2667652"/>
+                </a:lnTo>
+                <a:lnTo>
+                  <a:pt x="2776659" y="2667652"/>
+                </a:lnTo>
+                <a:lnTo>
+                  <a:pt x="2764742" y="2667652"/>
+                </a:lnTo>
+                <a:lnTo>
+                  <a:pt x="2752825" y="2667652"/>
+                </a:lnTo>
+                <a:lnTo>
+                  <a:pt x="2740908" y="2667652"/>
+                </a:lnTo>
+                <a:lnTo>
+                  <a:pt x="2728991" y="2667652"/>
+                </a:lnTo>
+                <a:lnTo>
+                  <a:pt x="2717074" y="2667652"/>
+                </a:lnTo>
+                <a:lnTo>
+                  <a:pt x="2705157" y="2667652"/>
+                </a:lnTo>
+                <a:lnTo>
+                  <a:pt x="2693240" y="2667652"/>
+                </a:lnTo>
+                <a:lnTo>
+                  <a:pt x="2681323" y="2667652"/>
+                </a:lnTo>
+                <a:lnTo>
+                  <a:pt x="2669406" y="2667652"/>
+                </a:lnTo>
+                <a:lnTo>
+                  <a:pt x="2657489" y="2667652"/>
+                </a:lnTo>
+                <a:lnTo>
+                  <a:pt x="2645572" y="2667652"/>
+                </a:lnTo>
+                <a:lnTo>
+                  <a:pt x="2633655" y="2667652"/>
+                </a:lnTo>
+                <a:lnTo>
+                  <a:pt x="2621738" y="2667652"/>
+                </a:lnTo>
+                <a:lnTo>
+                  <a:pt x="2609821" y="2667652"/>
+                </a:lnTo>
+                <a:lnTo>
+                  <a:pt x="2597904" y="2667652"/>
+                </a:lnTo>
+                <a:lnTo>
+                  <a:pt x="2585987" y="2667652"/>
+                </a:lnTo>
+                <a:lnTo>
+                  <a:pt x="2574070" y="2667652"/>
+                </a:lnTo>
+                <a:lnTo>
+                  <a:pt x="2562153" y="2667652"/>
+                </a:lnTo>
+                <a:lnTo>
+                  <a:pt x="2550236" y="2667652"/>
+                </a:lnTo>
+                <a:lnTo>
+                  <a:pt x="2538319" y="2667652"/>
+                </a:lnTo>
+                <a:lnTo>
+                  <a:pt x="2526402" y="2667652"/>
+                </a:lnTo>
+                <a:lnTo>
+                  <a:pt x="2514485" y="2667652"/>
+                </a:lnTo>
+                <a:lnTo>
+                  <a:pt x="2502568" y="2667652"/>
+                </a:lnTo>
+                <a:lnTo>
+                  <a:pt x="2490651" y="2667652"/>
+                </a:lnTo>
+                <a:lnTo>
+                  <a:pt x="2478734" y="2667652"/>
+                </a:lnTo>
+                <a:lnTo>
+                  <a:pt x="2466817" y="2667652"/>
+                </a:lnTo>
+                <a:lnTo>
+                  <a:pt x="2454900" y="2667652"/>
+                </a:lnTo>
+                <a:lnTo>
+                  <a:pt x="2442983" y="2667652"/>
+                </a:lnTo>
+                <a:lnTo>
+                  <a:pt x="2431066" y="2667652"/>
+                </a:lnTo>
+                <a:lnTo>
+                  <a:pt x="2419149" y="2667652"/>
+                </a:lnTo>
+                <a:lnTo>
+                  <a:pt x="2407232" y="2667652"/>
+                </a:lnTo>
+                <a:lnTo>
+                  <a:pt x="2395315" y="2667652"/>
+                </a:lnTo>
+                <a:lnTo>
+                  <a:pt x="2383398" y="2667652"/>
+                </a:lnTo>
+                <a:lnTo>
+                  <a:pt x="2371481" y="2667652"/>
+                </a:lnTo>
+                <a:lnTo>
+                  <a:pt x="2359564" y="2667652"/>
+                </a:lnTo>
+                <a:lnTo>
+                  <a:pt x="2347647" y="2667652"/>
+                </a:lnTo>
+                <a:lnTo>
+                  <a:pt x="2335730" y="2667652"/>
+                </a:lnTo>
+                <a:lnTo>
+                  <a:pt x="2323813" y="2667652"/>
+                </a:lnTo>
+                <a:lnTo>
+                  <a:pt x="2311896" y="2667652"/>
+                </a:lnTo>
+                <a:lnTo>
+                  <a:pt x="2299979" y="2667652"/>
+                </a:lnTo>
+                <a:lnTo>
+                  <a:pt x="2288062" y="2667652"/>
+                </a:lnTo>
+                <a:lnTo>
+                  <a:pt x="2276145" y="2667652"/>
+                </a:lnTo>
+                <a:lnTo>
+                  <a:pt x="2264228" y="2667652"/>
+                </a:lnTo>
+                <a:lnTo>
+                  <a:pt x="2252311" y="2667652"/>
+                </a:lnTo>
+                <a:lnTo>
+                  <a:pt x="2240394" y="2667652"/>
+                </a:lnTo>
+                <a:lnTo>
+                  <a:pt x="2228477" y="2667652"/>
+                </a:lnTo>
+                <a:lnTo>
+                  <a:pt x="2216560" y="2667652"/>
+                </a:lnTo>
+                <a:lnTo>
+                  <a:pt x="2204643" y="2667652"/>
+                </a:lnTo>
+                <a:lnTo>
+                  <a:pt x="2192726" y="2667652"/>
+                </a:lnTo>
+                <a:lnTo>
+                  <a:pt x="2180809" y="2667652"/>
+                </a:lnTo>
+                <a:lnTo>
+                  <a:pt x="2168892" y="2667652"/>
+                </a:lnTo>
+                <a:lnTo>
+                  <a:pt x="2156975" y="2667652"/>
+                </a:lnTo>
+                <a:lnTo>
+                  <a:pt x="2145058" y="2667652"/>
+                </a:lnTo>
+                <a:lnTo>
+                  <a:pt x="2133141" y="2667652"/>
+                </a:lnTo>
+                <a:lnTo>
+                  <a:pt x="2121224" y="2667652"/>
+                </a:lnTo>
+                <a:lnTo>
+                  <a:pt x="2109307" y="2667652"/>
+                </a:lnTo>
+                <a:lnTo>
+                  <a:pt x="2097390" y="2667652"/>
+                </a:lnTo>
+                <a:lnTo>
+                  <a:pt x="2085473" y="2667652"/>
+                </a:lnTo>
+                <a:lnTo>
+                  <a:pt x="2073556" y="2667652"/>
+                </a:lnTo>
+                <a:lnTo>
+                  <a:pt x="2061639" y="2667652"/>
+                </a:lnTo>
+                <a:lnTo>
+                  <a:pt x="2049722" y="2667652"/>
+                </a:lnTo>
+                <a:lnTo>
+                  <a:pt x="2037805" y="2667652"/>
+                </a:lnTo>
+                <a:lnTo>
+                  <a:pt x="2025888" y="2667652"/>
+                </a:lnTo>
+                <a:lnTo>
+                  <a:pt x="2013971" y="2667652"/>
+                </a:lnTo>
+                <a:lnTo>
+                  <a:pt x="2002054" y="2667652"/>
+                </a:lnTo>
+                <a:lnTo>
+                  <a:pt x="1990137" y="2667652"/>
+                </a:lnTo>
+                <a:lnTo>
+                  <a:pt x="1978220" y="2667652"/>
+                </a:lnTo>
+                <a:lnTo>
+                  <a:pt x="1966303" y="2667652"/>
+                </a:lnTo>
+                <a:lnTo>
+                  <a:pt x="1954386" y="2667652"/>
+                </a:lnTo>
+                <a:lnTo>
+                  <a:pt x="1942469" y="2667652"/>
+                </a:lnTo>
+                <a:lnTo>
+                  <a:pt x="1930552" y="2667652"/>
+                </a:lnTo>
+                <a:lnTo>
+                  <a:pt x="1918635" y="2667652"/>
+                </a:lnTo>
+                <a:lnTo>
+                  <a:pt x="1906718" y="2667652"/>
+                </a:lnTo>
+                <a:lnTo>
+                  <a:pt x="1894801" y="2667652"/>
+                </a:lnTo>
+                <a:lnTo>
+                  <a:pt x="1882884" y="2667652"/>
+                </a:lnTo>
+                <a:lnTo>
+                  <a:pt x="1870967" y="2667652"/>
+                </a:lnTo>
+                <a:lnTo>
+                  <a:pt x="1859050" y="2667652"/>
+                </a:lnTo>
+                <a:lnTo>
+                  <a:pt x="1847133" y="2667652"/>
+                </a:lnTo>
+                <a:lnTo>
+                  <a:pt x="1835216" y="2667652"/>
+                </a:lnTo>
+                <a:lnTo>
+                  <a:pt x="1823299" y="2667652"/>
+                </a:lnTo>
+                <a:lnTo>
+                  <a:pt x="1811382" y="2667652"/>
+                </a:lnTo>
+                <a:lnTo>
+                  <a:pt x="1799465" y="2667652"/>
+                </a:lnTo>
+                <a:lnTo>
+                  <a:pt x="1787548" y="2667652"/>
+                </a:lnTo>
+                <a:lnTo>
+                  <a:pt x="1775631" y="2667652"/>
+                </a:lnTo>
+                <a:lnTo>
+                  <a:pt x="1763714" y="2667652"/>
+                </a:lnTo>
+                <a:lnTo>
+                  <a:pt x="1751797" y="2667652"/>
+                </a:lnTo>
+                <a:lnTo>
+                  <a:pt x="1739880" y="2667652"/>
+                </a:lnTo>
+                <a:lnTo>
+                  <a:pt x="1727963" y="2667652"/>
+                </a:lnTo>
+                <a:lnTo>
+                  <a:pt x="1716046" y="2667652"/>
+                </a:lnTo>
+                <a:lnTo>
+                  <a:pt x="1704129" y="2667652"/>
+                </a:lnTo>
+                <a:lnTo>
+                  <a:pt x="1692212" y="2667652"/>
+                </a:lnTo>
+                <a:lnTo>
+                  <a:pt x="1680295" y="2667652"/>
+                </a:lnTo>
+                <a:lnTo>
+                  <a:pt x="1668378" y="2667652"/>
+                </a:lnTo>
+                <a:lnTo>
+                  <a:pt x="1656461" y="2667652"/>
+                </a:lnTo>
+                <a:lnTo>
+                  <a:pt x="1644544" y="2667652"/>
+                </a:lnTo>
+                <a:lnTo>
+                  <a:pt x="1632627" y="2667652"/>
+                </a:lnTo>
+                <a:lnTo>
+                  <a:pt x="1620710" y="2667652"/>
+                </a:lnTo>
+                <a:lnTo>
+                  <a:pt x="1608793" y="2667652"/>
+                </a:lnTo>
+                <a:lnTo>
+                  <a:pt x="1596876" y="2667652"/>
+                </a:lnTo>
+                <a:lnTo>
+                  <a:pt x="1584960" y="2667652"/>
+                </a:lnTo>
+                <a:lnTo>
+                  <a:pt x="1573043" y="2667652"/>
+                </a:lnTo>
+                <a:lnTo>
+                  <a:pt x="1561126" y="2667652"/>
+                </a:lnTo>
+                <a:lnTo>
+                  <a:pt x="1549209" y="2667652"/>
+                </a:lnTo>
+                <a:lnTo>
+                  <a:pt x="1537292" y="2667652"/>
+                </a:lnTo>
+                <a:lnTo>
+                  <a:pt x="1525375" y="2667652"/>
+                </a:lnTo>
+                <a:lnTo>
+                  <a:pt x="1513458" y="2667652"/>
+                </a:lnTo>
+                <a:lnTo>
+                  <a:pt x="1501541" y="2667652"/>
+                </a:lnTo>
+                <a:lnTo>
+                  <a:pt x="1489624" y="2667652"/>
+                </a:lnTo>
+                <a:lnTo>
+                  <a:pt x="1477707" y="2667652"/>
+                </a:lnTo>
+                <a:lnTo>
+                  <a:pt x="1465790" y="2667652"/>
+                </a:lnTo>
+                <a:lnTo>
+                  <a:pt x="1453873" y="2667652"/>
+                </a:lnTo>
+                <a:lnTo>
+                  <a:pt x="1441956" y="2667652"/>
+                </a:lnTo>
+                <a:lnTo>
+                  <a:pt x="1430039" y="2667652"/>
+                </a:lnTo>
+                <a:lnTo>
+                  <a:pt x="1418122" y="2667652"/>
+                </a:lnTo>
+                <a:lnTo>
+                  <a:pt x="1406205" y="2667652"/>
+                </a:lnTo>
+                <a:lnTo>
+                  <a:pt x="1394288" y="2667652"/>
+                </a:lnTo>
+                <a:lnTo>
+                  <a:pt x="1382371" y="2667652"/>
+                </a:lnTo>
+                <a:lnTo>
+                  <a:pt x="1370454" y="2667652"/>
+                </a:lnTo>
+                <a:lnTo>
+                  <a:pt x="1358537" y="2667652"/>
+                </a:lnTo>
+                <a:lnTo>
+                  <a:pt x="1346620" y="2667652"/>
+                </a:lnTo>
+                <a:lnTo>
+                  <a:pt x="1334703" y="2667652"/>
+                </a:lnTo>
+                <a:lnTo>
+                  <a:pt x="1322786" y="2667652"/>
+                </a:lnTo>
+                <a:lnTo>
+                  <a:pt x="1310869" y="2667652"/>
+                </a:lnTo>
+                <a:lnTo>
+                  <a:pt x="1298952" y="2667652"/>
+                </a:lnTo>
+                <a:lnTo>
+                  <a:pt x="1287035" y="2667652"/>
+                </a:lnTo>
+                <a:lnTo>
+                  <a:pt x="1275118" y="2667652"/>
+                </a:lnTo>
+                <a:lnTo>
+                  <a:pt x="1263201" y="2667652"/>
+                </a:lnTo>
+                <a:lnTo>
+                  <a:pt x="1251284" y="2667652"/>
+                </a:lnTo>
+                <a:lnTo>
+                  <a:pt x="1239367" y="2667652"/>
+                </a:lnTo>
+                <a:lnTo>
+                  <a:pt x="1227450" y="2667652"/>
+                </a:lnTo>
+                <a:lnTo>
+                  <a:pt x="1215533" y="2667652"/>
+                </a:lnTo>
+                <a:lnTo>
+                  <a:pt x="1203616" y="2667652"/>
+                </a:lnTo>
+                <a:lnTo>
+                  <a:pt x="1191699" y="2667652"/>
+                </a:lnTo>
+                <a:lnTo>
+                  <a:pt x="1179782" y="2667652"/>
+                </a:lnTo>
+                <a:lnTo>
+                  <a:pt x="1167865" y="2667652"/>
+                </a:lnTo>
+                <a:lnTo>
+                  <a:pt x="1155948" y="2667652"/>
+                </a:lnTo>
+                <a:lnTo>
+                  <a:pt x="1144031" y="2667652"/>
+                </a:lnTo>
+                <a:lnTo>
+                  <a:pt x="1132114" y="2667652"/>
+                </a:lnTo>
+                <a:lnTo>
+                  <a:pt x="1120197" y="2667652"/>
+                </a:lnTo>
+                <a:lnTo>
+                  <a:pt x="1108280" y="2667652"/>
+                </a:lnTo>
+                <a:lnTo>
+                  <a:pt x="1096363" y="2667652"/>
+                </a:lnTo>
+                <a:lnTo>
+                  <a:pt x="1084446" y="2667652"/>
+                </a:lnTo>
+                <a:lnTo>
+                  <a:pt x="1072529" y="2667652"/>
+                </a:lnTo>
+                <a:lnTo>
+                  <a:pt x="1060612" y="2667652"/>
+                </a:lnTo>
+                <a:lnTo>
+                  <a:pt x="1048695" y="2667652"/>
+                </a:lnTo>
+                <a:lnTo>
+                  <a:pt x="1036778" y="2667652"/>
+                </a:lnTo>
+                <a:lnTo>
+                  <a:pt x="1024861" y="2667652"/>
+                </a:lnTo>
+                <a:lnTo>
+                  <a:pt x="1012944" y="2667652"/>
+                </a:lnTo>
+                <a:lnTo>
+                  <a:pt x="1001027" y="2667652"/>
+                </a:lnTo>
+                <a:lnTo>
+                  <a:pt x="989110" y="2667652"/>
+                </a:lnTo>
+                <a:lnTo>
+                  <a:pt x="977193" y="2667652"/>
+                </a:lnTo>
+                <a:lnTo>
+                  <a:pt x="965276" y="2667652"/>
+                </a:lnTo>
+                <a:lnTo>
+                  <a:pt x="953359" y="2667652"/>
+                </a:lnTo>
+                <a:lnTo>
+                  <a:pt x="941442" y="2667652"/>
+                </a:lnTo>
+                <a:lnTo>
+                  <a:pt x="929525" y="2667652"/>
+                </a:lnTo>
+                <a:lnTo>
+                  <a:pt x="917608" y="2667652"/>
+                </a:lnTo>
+                <a:lnTo>
+                  <a:pt x="905691" y="2667652"/>
+                </a:lnTo>
+                <a:lnTo>
+                  <a:pt x="893774" y="2667652"/>
+                </a:lnTo>
+                <a:lnTo>
+                  <a:pt x="881857" y="2667652"/>
+                </a:lnTo>
+                <a:lnTo>
+                  <a:pt x="869940" y="2667652"/>
+                </a:lnTo>
+                <a:lnTo>
+                  <a:pt x="858023" y="2667652"/>
+                </a:lnTo>
+                <a:lnTo>
+                  <a:pt x="846106" y="2667652"/>
+                </a:lnTo>
+                <a:lnTo>
+                  <a:pt x="834189" y="2667652"/>
+                </a:lnTo>
+                <a:lnTo>
+                  <a:pt x="822272" y="2667652"/>
+                </a:lnTo>
+                <a:lnTo>
+                  <a:pt x="810355" y="2667652"/>
+                </a:lnTo>
+                <a:lnTo>
+                  <a:pt x="798438" y="2667652"/>
+                </a:lnTo>
+                <a:lnTo>
+                  <a:pt x="786521" y="2667652"/>
+                </a:lnTo>
+                <a:lnTo>
+                  <a:pt x="774604" y="2667652"/>
+                </a:lnTo>
+                <a:lnTo>
+                  <a:pt x="762687" y="2667652"/>
+                </a:lnTo>
+                <a:lnTo>
+                  <a:pt x="750770" y="2667652"/>
+                </a:lnTo>
+                <a:lnTo>
+                  <a:pt x="738853" y="2667652"/>
+                </a:lnTo>
+                <a:lnTo>
+                  <a:pt x="726936" y="2667652"/>
+                </a:lnTo>
+                <a:lnTo>
+                  <a:pt x="715019" y="2667652"/>
+                </a:lnTo>
+                <a:lnTo>
+                  <a:pt x="703102" y="2667652"/>
+                </a:lnTo>
+                <a:lnTo>
+                  <a:pt x="691185" y="2667652"/>
+                </a:lnTo>
+                <a:lnTo>
+                  <a:pt x="679268" y="2667652"/>
+                </a:lnTo>
+                <a:lnTo>
+                  <a:pt x="667351" y="2667652"/>
+                </a:lnTo>
+                <a:lnTo>
+                  <a:pt x="655434" y="2667652"/>
+                </a:lnTo>
+                <a:lnTo>
+                  <a:pt x="643517" y="2667652"/>
+                </a:lnTo>
+                <a:lnTo>
+                  <a:pt x="631600" y="2667652"/>
+                </a:lnTo>
+                <a:lnTo>
+                  <a:pt x="619683" y="2667652"/>
+                </a:lnTo>
+                <a:lnTo>
+                  <a:pt x="607766" y="2667652"/>
+                </a:lnTo>
+                <a:lnTo>
+                  <a:pt x="595849" y="2667652"/>
+                </a:lnTo>
+                <a:lnTo>
+                  <a:pt x="583932" y="2667652"/>
+                </a:lnTo>
+                <a:lnTo>
+                  <a:pt x="572015" y="2667652"/>
+                </a:lnTo>
+                <a:lnTo>
+                  <a:pt x="560098" y="2667652"/>
+                </a:lnTo>
+                <a:lnTo>
+                  <a:pt x="548181" y="2667652"/>
+                </a:lnTo>
+                <a:lnTo>
+                  <a:pt x="536264" y="2667652"/>
+                </a:lnTo>
+                <a:lnTo>
+                  <a:pt x="524347" y="2667652"/>
+                </a:lnTo>
+                <a:lnTo>
+                  <a:pt x="512430" y="2667652"/>
+                </a:lnTo>
+                <a:lnTo>
+                  <a:pt x="500513" y="2667652"/>
+                </a:lnTo>
+                <a:lnTo>
+                  <a:pt x="488596" y="2667652"/>
+                </a:lnTo>
+                <a:lnTo>
+                  <a:pt x="476679" y="2667652"/>
+                </a:lnTo>
+                <a:lnTo>
+                  <a:pt x="464762" y="2667652"/>
+                </a:lnTo>
+                <a:lnTo>
+                  <a:pt x="452845" y="2667652"/>
+                </a:lnTo>
+                <a:lnTo>
+                  <a:pt x="440928" y="2667652"/>
+                </a:lnTo>
+                <a:lnTo>
+                  <a:pt x="429011" y="2667652"/>
+                </a:lnTo>
+                <a:lnTo>
+                  <a:pt x="417094" y="2667652"/>
+                </a:lnTo>
+                <a:lnTo>
+                  <a:pt x="405177" y="2667652"/>
+                </a:lnTo>
+                <a:lnTo>
+                  <a:pt x="393260" y="2667652"/>
+                </a:lnTo>
+                <a:lnTo>
+                  <a:pt x="381343" y="2667652"/>
+                </a:lnTo>
+                <a:lnTo>
+                  <a:pt x="369426" y="2667652"/>
+                </a:lnTo>
+                <a:lnTo>
+                  <a:pt x="357509" y="2667652"/>
+                </a:lnTo>
+                <a:lnTo>
+                  <a:pt x="345592" y="2667652"/>
+                </a:lnTo>
+                <a:lnTo>
+                  <a:pt x="333675" y="2667652"/>
+                </a:lnTo>
+                <a:lnTo>
+                  <a:pt x="321758" y="2667652"/>
+                </a:lnTo>
+                <a:lnTo>
+                  <a:pt x="309841" y="2667652"/>
+                </a:lnTo>
+                <a:lnTo>
+                  <a:pt x="297924" y="2667652"/>
+                </a:lnTo>
+                <a:lnTo>
+                  <a:pt x="286007" y="2667652"/>
+                </a:lnTo>
+                <a:lnTo>
+                  <a:pt x="274090" y="2667652"/>
+                </a:lnTo>
+                <a:lnTo>
+                  <a:pt x="262173" y="2667652"/>
+                </a:lnTo>
+                <a:lnTo>
+                  <a:pt x="250256" y="2667652"/>
+                </a:lnTo>
+                <a:lnTo>
+                  <a:pt x="238339" y="2667652"/>
+                </a:lnTo>
+                <a:lnTo>
+                  <a:pt x="226422" y="2667652"/>
+                </a:lnTo>
+                <a:lnTo>
+                  <a:pt x="214505" y="2667652"/>
+                </a:lnTo>
+                <a:lnTo>
+                  <a:pt x="202588" y="2667652"/>
+                </a:lnTo>
+                <a:lnTo>
+                  <a:pt x="190671" y="2667652"/>
+                </a:lnTo>
+                <a:lnTo>
+                  <a:pt x="178754" y="2667652"/>
+                </a:lnTo>
+                <a:lnTo>
+                  <a:pt x="166837" y="2667652"/>
+                </a:lnTo>
+                <a:lnTo>
+                  <a:pt x="154920" y="2667652"/>
+                </a:lnTo>
+                <a:lnTo>
+                  <a:pt x="143003" y="2667652"/>
+                </a:lnTo>
+                <a:lnTo>
+                  <a:pt x="131086" y="2667652"/>
+                </a:lnTo>
+                <a:lnTo>
+                  <a:pt x="119169" y="2667652"/>
+                </a:lnTo>
+                <a:lnTo>
+                  <a:pt x="107252" y="2667652"/>
+                </a:lnTo>
+                <a:lnTo>
+                  <a:pt x="95335" y="2667652"/>
+                </a:lnTo>
+                <a:lnTo>
+                  <a:pt x="83418" y="2667652"/>
+                </a:lnTo>
+                <a:lnTo>
+                  <a:pt x="71501" y="2667652"/>
+                </a:lnTo>
+                <a:lnTo>
+                  <a:pt x="59584" y="2667652"/>
+                </a:lnTo>
+                <a:lnTo>
+                  <a:pt x="47667" y="2667652"/>
+                </a:lnTo>
+                <a:lnTo>
+                  <a:pt x="35750" y="2667652"/>
+                </a:lnTo>
+                <a:lnTo>
+                  <a:pt x="23833" y="2667652"/>
+                </a:lnTo>
+                <a:lnTo>
+                  <a:pt x="11916" y="2667652"/>
+                </a:lnTo>
+                <a:lnTo>
+                  <a:pt x="0" y="2667652"/>
+                </a:lnTo>
+                <a:close/>
+              </a:path>
+            </a:pathLst>
+          </a:custGeom>
+          <a:solidFill>
+            <a:srgbClr val="8EDBD4">
+              <a:alpha val="30000"/>
+            </a:srgbClr>
+          </a:solidFill>
+          <a:ln w="10160">
+            <a:solidFill>
+              <a:srgbClr val="8EDBD4">
+                <a:alpha val="30000"/>
+              </a:srgbClr>
+            </a:solidFill>
+          </a:ln>
+          <a:effectLst/>
+        </p:spPr>
+        <p:txBody>
+          <a:bodyPr rtlCol="0" anchor="ctr"/>
+          <a:lstStyle/>
+          <a:p>
+            <a:pPr algn="ctr"/>
+          </a:p>
+        </p:txBody>
+      </p:sp>
+      <p:sp>
+        <p:nvSpPr>
+          <p:cNvPr id="24" name="C4-E38 polygon 22" descr="sci-ppt:o022"/>
+          <p:cNvSpPr/>
+          <p:nvPr/>
+        </p:nvSpPr>
+        <p:spPr>
+          <a:xfrm>
+            <a:off x="914400" y="2189089"/>
+            <a:ext cx="4754880" cy="2657231"/>
+          </a:xfrm>
+          <a:custGeom>
+            <a:avLst/>
+            <a:gdLst/>
+            <a:ahLst/>
+            <a:cxnLst/>
+            <a:rect l="l" t="t" r="r" b="b"/>
+            <a:pathLst>
+              <a:path w="4754880" h="2657231">
+                <a:moveTo>
+                  <a:pt x="0" y="2657231"/>
+                </a:moveTo>
+                <a:lnTo>
+                  <a:pt x="23833" y="2469661"/>
+                </a:lnTo>
+                <a:lnTo>
+                  <a:pt x="47667" y="2282092"/>
+                </a:lnTo>
+                <a:lnTo>
+                  <a:pt x="71501" y="2094523"/>
+                </a:lnTo>
+                <a:lnTo>
+                  <a:pt x="95335" y="1906954"/>
+                </a:lnTo>
+                <a:lnTo>
+                  <a:pt x="119169" y="1719384"/>
+                </a:lnTo>
+                <a:lnTo>
+                  <a:pt x="143003" y="1531815"/>
+                </a:lnTo>
+                <a:lnTo>
+                  <a:pt x="166837" y="1344246"/>
+                </a:lnTo>
+                <a:lnTo>
+                  <a:pt x="190671" y="1156677"/>
+                </a:lnTo>
+                <a:lnTo>
+                  <a:pt x="214505" y="969107"/>
+                </a:lnTo>
+                <a:lnTo>
+                  <a:pt x="238339" y="781538"/>
+                </a:lnTo>
+                <a:lnTo>
+                  <a:pt x="262173" y="593969"/>
+                </a:lnTo>
+                <a:lnTo>
+                  <a:pt x="286007" y="406400"/>
+                </a:lnTo>
+                <a:lnTo>
+                  <a:pt x="309841" y="218830"/>
+                </a:lnTo>
+                <a:lnTo>
+                  <a:pt x="333675" y="31261"/>
+                </a:lnTo>
+                <a:lnTo>
+                  <a:pt x="357509" y="0"/>
+                </a:lnTo>
+                <a:lnTo>
+                  <a:pt x="381343" y="20841"/>
+                </a:lnTo>
+                <a:lnTo>
+                  <a:pt x="405177" y="41682"/>
+                </a:lnTo>
+                <a:lnTo>
+                  <a:pt x="429011" y="62523"/>
+                </a:lnTo>
+                <a:lnTo>
+                  <a:pt x="452845" y="83364"/>
+                </a:lnTo>
+                <a:lnTo>
+                  <a:pt x="476679" y="104205"/>
+                </a:lnTo>
+                <a:lnTo>
+                  <a:pt x="500513" y="125046"/>
+                </a:lnTo>
+                <a:lnTo>
+                  <a:pt x="524347" y="145887"/>
+                </a:lnTo>
+                <a:lnTo>
+                  <a:pt x="548181" y="166728"/>
+                </a:lnTo>
+                <a:lnTo>
+                  <a:pt x="572015" y="187569"/>
+                </a:lnTo>
+                <a:lnTo>
+                  <a:pt x="595849" y="208410"/>
+                </a:lnTo>
+                <a:lnTo>
+                  <a:pt x="619683" y="229251"/>
+                </a:lnTo>
+                <a:lnTo>
+                  <a:pt x="643517" y="250092"/>
+                </a:lnTo>
+                <a:lnTo>
+                  <a:pt x="667351" y="270933"/>
+                </a:lnTo>
+                <a:lnTo>
+                  <a:pt x="691185" y="291774"/>
+                </a:lnTo>
+                <a:lnTo>
+                  <a:pt x="715019" y="312615"/>
+                </a:lnTo>
+                <a:lnTo>
+                  <a:pt x="738853" y="333456"/>
+                </a:lnTo>
+                <a:lnTo>
+                  <a:pt x="762687" y="354297"/>
+                </a:lnTo>
+                <a:lnTo>
+                  <a:pt x="786521" y="375138"/>
+                </a:lnTo>
+                <a:lnTo>
+                  <a:pt x="810355" y="395979"/>
+                </a:lnTo>
+                <a:lnTo>
+                  <a:pt x="834189" y="416820"/>
+                </a:lnTo>
+                <a:lnTo>
+                  <a:pt x="858023" y="437661"/>
+                </a:lnTo>
+                <a:lnTo>
+                  <a:pt x="881857" y="458502"/>
+                </a:lnTo>
+                <a:lnTo>
+                  <a:pt x="905691" y="479343"/>
+                </a:lnTo>
+                <a:lnTo>
+                  <a:pt x="929525" y="500184"/>
+                </a:lnTo>
+                <a:lnTo>
+                  <a:pt x="953359" y="521025"/>
+                </a:lnTo>
+                <a:lnTo>
+                  <a:pt x="977193" y="541866"/>
+                </a:lnTo>
+                <a:lnTo>
+                  <a:pt x="1001027" y="562707"/>
+                </a:lnTo>
+                <a:lnTo>
+                  <a:pt x="1024861" y="583548"/>
+                </a:lnTo>
+                <a:lnTo>
+                  <a:pt x="1048695" y="604389"/>
+                </a:lnTo>
+                <a:lnTo>
+                  <a:pt x="1072529" y="625230"/>
+                </a:lnTo>
+                <a:lnTo>
+                  <a:pt x="1096363" y="646072"/>
+                </a:lnTo>
+                <a:lnTo>
+                  <a:pt x="1120197" y="666913"/>
+                </a:lnTo>
+                <a:lnTo>
+                  <a:pt x="1144031" y="687754"/>
+                </a:lnTo>
+                <a:lnTo>
+                  <a:pt x="1167865" y="708595"/>
+                </a:lnTo>
+                <a:lnTo>
+                  <a:pt x="1191699" y="729436"/>
+                </a:lnTo>
+                <a:lnTo>
+                  <a:pt x="1215533" y="750277"/>
+                </a:lnTo>
+                <a:lnTo>
+                  <a:pt x="1239367" y="771118"/>
+                </a:lnTo>
+                <a:lnTo>
+                  <a:pt x="1263201" y="791959"/>
+                </a:lnTo>
+                <a:lnTo>
+                  <a:pt x="1287035" y="812800"/>
+                </a:lnTo>
+                <a:lnTo>
+                  <a:pt x="1310869" y="833641"/>
+                </a:lnTo>
+                <a:lnTo>
+                  <a:pt x="1334703" y="854482"/>
+                </a:lnTo>
+                <a:lnTo>
+                  <a:pt x="1358537" y="875323"/>
+                </a:lnTo>
+                <a:lnTo>
+                  <a:pt x="1382371" y="896164"/>
+                </a:lnTo>
+                <a:lnTo>
+                  <a:pt x="1406205" y="917005"/>
+                </a:lnTo>
+                <a:lnTo>
+                  <a:pt x="1430039" y="937846"/>
+                </a:lnTo>
+                <a:lnTo>
+                  <a:pt x="1453873" y="958687"/>
+                </a:lnTo>
+                <a:lnTo>
+                  <a:pt x="1477707" y="979528"/>
+                </a:lnTo>
+                <a:lnTo>
+                  <a:pt x="1501541" y="1000369"/>
+                </a:lnTo>
+                <a:lnTo>
+                  <a:pt x="1525375" y="1021210"/>
+                </a:lnTo>
+                <a:lnTo>
+                  <a:pt x="1549209" y="1042051"/>
+                </a:lnTo>
+                <a:lnTo>
+                  <a:pt x="1573043" y="1062892"/>
+                </a:lnTo>
+                <a:lnTo>
+                  <a:pt x="1596876" y="1083733"/>
+                </a:lnTo>
+                <a:lnTo>
+                  <a:pt x="1620710" y="1104574"/>
+                </a:lnTo>
+                <a:lnTo>
+                  <a:pt x="1644544" y="1125415"/>
+                </a:lnTo>
+                <a:lnTo>
+                  <a:pt x="1668378" y="1146256"/>
+                </a:lnTo>
+                <a:lnTo>
+                  <a:pt x="1692212" y="1167097"/>
+                </a:lnTo>
+                <a:lnTo>
+                  <a:pt x="1716046" y="1187938"/>
+                </a:lnTo>
+                <a:lnTo>
+                  <a:pt x="1739880" y="1208779"/>
+                </a:lnTo>
+                <a:lnTo>
+                  <a:pt x="1763714" y="1229620"/>
+                </a:lnTo>
+                <a:lnTo>
+                  <a:pt x="1787548" y="1250461"/>
+                </a:lnTo>
+                <a:lnTo>
+                  <a:pt x="1811382" y="1271302"/>
+                </a:lnTo>
+                <a:lnTo>
+                  <a:pt x="1835216" y="1292143"/>
+                </a:lnTo>
+                <a:lnTo>
+                  <a:pt x="1859050" y="1312984"/>
+                </a:lnTo>
+                <a:lnTo>
+                  <a:pt x="1882884" y="1333825"/>
+                </a:lnTo>
+                <a:lnTo>
+                  <a:pt x="1906718" y="1354666"/>
+                </a:lnTo>
+                <a:lnTo>
+                  <a:pt x="1930552" y="1375507"/>
+                </a:lnTo>
+                <a:lnTo>
+                  <a:pt x="1954386" y="1396348"/>
+                </a:lnTo>
+                <a:lnTo>
+                  <a:pt x="1978220" y="1417189"/>
+                </a:lnTo>
+                <a:lnTo>
+                  <a:pt x="2002054" y="1438031"/>
+                </a:lnTo>
+                <a:lnTo>
+                  <a:pt x="2025888" y="1458872"/>
+                </a:lnTo>
+                <a:lnTo>
+                  <a:pt x="2049722" y="1479713"/>
+                </a:lnTo>
+                <a:lnTo>
+                  <a:pt x="2073556" y="1500554"/>
+                </a:lnTo>
+                <a:lnTo>
+                  <a:pt x="2097390" y="1521395"/>
+                </a:lnTo>
+                <a:lnTo>
+                  <a:pt x="2121224" y="1542236"/>
+                </a:lnTo>
+                <a:lnTo>
+                  <a:pt x="2145058" y="1563077"/>
+                </a:lnTo>
+                <a:lnTo>
+                  <a:pt x="2168892" y="1583918"/>
+                </a:lnTo>
+                <a:lnTo>
+                  <a:pt x="2192726" y="1604759"/>
+                </a:lnTo>
+                <a:lnTo>
+                  <a:pt x="2216560" y="1625600"/>
+                </a:lnTo>
+                <a:lnTo>
+                  <a:pt x="2240394" y="1646441"/>
+                </a:lnTo>
+                <a:lnTo>
+                  <a:pt x="2264228" y="1667282"/>
+                </a:lnTo>
+                <a:lnTo>
+                  <a:pt x="2288062" y="1688123"/>
+                </a:lnTo>
+                <a:lnTo>
+                  <a:pt x="2311896" y="1708964"/>
+                </a:lnTo>
+                <a:lnTo>
+                  <a:pt x="2335730" y="1729805"/>
+                </a:lnTo>
+                <a:lnTo>
+                  <a:pt x="2359564" y="1750646"/>
+                </a:lnTo>
+                <a:lnTo>
+                  <a:pt x="2383398" y="1771487"/>
+                </a:lnTo>
+                <a:lnTo>
+                  <a:pt x="2407232" y="1792328"/>
+                </a:lnTo>
+                <a:lnTo>
+                  <a:pt x="2431066" y="1813169"/>
+                </a:lnTo>
+                <a:lnTo>
+                  <a:pt x="2454900" y="1834010"/>
+                </a:lnTo>
+                <a:lnTo>
+                  <a:pt x="2478734" y="1854851"/>
+                </a:lnTo>
+                <a:lnTo>
+                  <a:pt x="2502568" y="1875692"/>
+                </a:lnTo>
+                <a:lnTo>
+                  <a:pt x="2526402" y="1896533"/>
+                </a:lnTo>
+                <a:lnTo>
+                  <a:pt x="2550236" y="1917374"/>
+                </a:lnTo>
+                <a:lnTo>
+                  <a:pt x="2574070" y="1938215"/>
+                </a:lnTo>
+                <a:lnTo>
+                  <a:pt x="2597904" y="1959056"/>
+                </a:lnTo>
+                <a:lnTo>
+                  <a:pt x="2621738" y="1979897"/>
+                </a:lnTo>
+                <a:lnTo>
+                  <a:pt x="2645572" y="2000738"/>
+                </a:lnTo>
+                <a:lnTo>
+                  <a:pt x="2669406" y="2021579"/>
+                </a:lnTo>
+                <a:lnTo>
+                  <a:pt x="2693240" y="2042420"/>
+                </a:lnTo>
+                <a:lnTo>
+                  <a:pt x="2717074" y="2063261"/>
+                </a:lnTo>
+                <a:lnTo>
+                  <a:pt x="2740908" y="2084102"/>
+                </a:lnTo>
+                <a:lnTo>
+                  <a:pt x="2764742" y="2104943"/>
+                </a:lnTo>
+                <a:lnTo>
+                  <a:pt x="2788576" y="2125784"/>
+                </a:lnTo>
+                <a:lnTo>
+                  <a:pt x="2812410" y="2146625"/>
+                </a:lnTo>
+                <a:lnTo>
+                  <a:pt x="2836244" y="2167466"/>
+                </a:lnTo>
+                <a:lnTo>
+                  <a:pt x="2860078" y="2188307"/>
+                </a:lnTo>
+                <a:lnTo>
+                  <a:pt x="2883912" y="2209148"/>
+                </a:lnTo>
+                <a:lnTo>
+                  <a:pt x="2907746" y="2229989"/>
+                </a:lnTo>
+                <a:lnTo>
+                  <a:pt x="2931580" y="2250831"/>
+                </a:lnTo>
+                <a:lnTo>
+                  <a:pt x="2955414" y="2271672"/>
+                </a:lnTo>
+                <a:lnTo>
+                  <a:pt x="2979248" y="2292513"/>
+                </a:lnTo>
+                <a:lnTo>
+                  <a:pt x="3003082" y="2313354"/>
+                </a:lnTo>
+                <a:lnTo>
+                  <a:pt x="3026916" y="2334195"/>
+                </a:lnTo>
+                <a:lnTo>
+                  <a:pt x="3050750" y="2355036"/>
+                </a:lnTo>
+                <a:lnTo>
+                  <a:pt x="3074584" y="2375877"/>
+                </a:lnTo>
+                <a:lnTo>
+                  <a:pt x="3098418" y="2396718"/>
+                </a:lnTo>
+                <a:lnTo>
+                  <a:pt x="3122252" y="2417559"/>
+                </a:lnTo>
+                <a:lnTo>
+                  <a:pt x="3146086" y="2438400"/>
+                </a:lnTo>
+                <a:lnTo>
+                  <a:pt x="3169920" y="2459241"/>
+                </a:lnTo>
+                <a:lnTo>
+                  <a:pt x="3193753" y="2480082"/>
+                </a:lnTo>
+                <a:lnTo>
+                  <a:pt x="3217587" y="2500923"/>
+                </a:lnTo>
+                <a:lnTo>
+                  <a:pt x="3241421" y="2521764"/>
+                </a:lnTo>
+                <a:lnTo>
+                  <a:pt x="3265255" y="2542605"/>
+                </a:lnTo>
+                <a:lnTo>
+                  <a:pt x="3289089" y="2563446"/>
+                </a:lnTo>
+                <a:lnTo>
+                  <a:pt x="3312923" y="2584287"/>
+                </a:lnTo>
+                <a:lnTo>
+                  <a:pt x="3336757" y="2605128"/>
+                </a:lnTo>
+                <a:lnTo>
+                  <a:pt x="3360591" y="2625969"/>
+                </a:lnTo>
+                <a:lnTo>
+                  <a:pt x="3384425" y="2646810"/>
+                </a:lnTo>
+                <a:lnTo>
+                  <a:pt x="3408259" y="2657231"/>
+                </a:lnTo>
+                <a:lnTo>
+                  <a:pt x="3432093" y="2657231"/>
+                </a:lnTo>
+                <a:lnTo>
+                  <a:pt x="3455927" y="2657231"/>
+                </a:lnTo>
+                <a:lnTo>
+                  <a:pt x="3479761" y="2657231"/>
+                </a:lnTo>
+                <a:lnTo>
+                  <a:pt x="3503595" y="2657231"/>
+                </a:lnTo>
+                <a:lnTo>
+                  <a:pt x="3527429" y="2657231"/>
+                </a:lnTo>
+                <a:lnTo>
+                  <a:pt x="3551263" y="2657231"/>
+                </a:lnTo>
+                <a:lnTo>
+                  <a:pt x="3575097" y="2657231"/>
+                </a:lnTo>
+                <a:lnTo>
+                  <a:pt x="3598931" y="2657231"/>
+                </a:lnTo>
+                <a:lnTo>
+                  <a:pt x="3622765" y="2657231"/>
+                </a:lnTo>
+                <a:lnTo>
+                  <a:pt x="3646599" y="2657231"/>
+                </a:lnTo>
+                <a:lnTo>
+                  <a:pt x="3670433" y="2657231"/>
+                </a:lnTo>
+                <a:lnTo>
+                  <a:pt x="3694267" y="2657231"/>
+                </a:lnTo>
+                <a:lnTo>
+                  <a:pt x="3718101" y="2657231"/>
+                </a:lnTo>
+                <a:lnTo>
+                  <a:pt x="3741935" y="2657231"/>
+                </a:lnTo>
+                <a:lnTo>
+                  <a:pt x="3765769" y="2657231"/>
+                </a:lnTo>
+                <a:lnTo>
+                  <a:pt x="3789603" y="2657231"/>
+                </a:lnTo>
+                <a:lnTo>
+                  <a:pt x="3813437" y="2657231"/>
+                </a:lnTo>
+                <a:lnTo>
+                  <a:pt x="3837271" y="2657231"/>
+                </a:lnTo>
+                <a:lnTo>
+                  <a:pt x="3861105" y="2657231"/>
+                </a:lnTo>
+                <a:lnTo>
+                  <a:pt x="3884939" y="2657231"/>
+                </a:lnTo>
+                <a:lnTo>
+                  <a:pt x="3908773" y="2657231"/>
+                </a:lnTo>
+                <a:lnTo>
+                  <a:pt x="3932607" y="2657231"/>
+                </a:lnTo>
+                <a:lnTo>
+                  <a:pt x="3956441" y="2657231"/>
+                </a:lnTo>
+                <a:lnTo>
+                  <a:pt x="3980275" y="2657231"/>
+                </a:lnTo>
+                <a:lnTo>
+                  <a:pt x="4004109" y="2657231"/>
+                </a:lnTo>
+                <a:lnTo>
+                  <a:pt x="4027943" y="2657231"/>
+                </a:lnTo>
+                <a:lnTo>
+                  <a:pt x="4051777" y="2657231"/>
+                </a:lnTo>
+                <a:lnTo>
+                  <a:pt x="4075611" y="2657231"/>
+                </a:lnTo>
+                <a:lnTo>
+                  <a:pt x="4099445" y="2657231"/>
+                </a:lnTo>
+                <a:lnTo>
+                  <a:pt x="4123279" y="2657231"/>
+                </a:lnTo>
+                <a:lnTo>
+                  <a:pt x="4147113" y="2657231"/>
+                </a:lnTo>
+                <a:lnTo>
+                  <a:pt x="4170947" y="2657231"/>
+                </a:lnTo>
+                <a:lnTo>
+                  <a:pt x="4194781" y="2657231"/>
+                </a:lnTo>
+                <a:lnTo>
+                  <a:pt x="4218615" y="2657231"/>
+                </a:lnTo>
+                <a:lnTo>
+                  <a:pt x="4242449" y="2657231"/>
+                </a:lnTo>
+                <a:lnTo>
+                  <a:pt x="4266283" y="2657231"/>
+                </a:lnTo>
+                <a:lnTo>
+                  <a:pt x="4290117" y="2657231"/>
+                </a:lnTo>
+                <a:lnTo>
+                  <a:pt x="4313951" y="2657231"/>
+                </a:lnTo>
+                <a:lnTo>
+                  <a:pt x="4337785" y="2657231"/>
+                </a:lnTo>
+                <a:lnTo>
+                  <a:pt x="4361619" y="2657231"/>
+                </a:lnTo>
+                <a:lnTo>
+                  <a:pt x="4385453" y="2657231"/>
+                </a:lnTo>
+                <a:lnTo>
+                  <a:pt x="4409287" y="2657231"/>
+                </a:lnTo>
+                <a:lnTo>
+                  <a:pt x="4433121" y="2657231"/>
+                </a:lnTo>
+                <a:lnTo>
+                  <a:pt x="4456955" y="2657231"/>
+                </a:lnTo>
+                <a:lnTo>
+                  <a:pt x="4480789" y="2657231"/>
+                </a:lnTo>
+                <a:lnTo>
+                  <a:pt x="4504623" y="2657231"/>
+                </a:lnTo>
+                <a:lnTo>
+                  <a:pt x="4528457" y="2657231"/>
+                </a:lnTo>
+                <a:lnTo>
+                  <a:pt x="4552291" y="2657231"/>
+                </a:lnTo>
+                <a:lnTo>
+                  <a:pt x="4576125" y="2657231"/>
+                </a:lnTo>
+                <a:lnTo>
+                  <a:pt x="4599959" y="2657231"/>
+                </a:lnTo>
+                <a:lnTo>
+                  <a:pt x="4623793" y="2657231"/>
+                </a:lnTo>
+                <a:lnTo>
+                  <a:pt x="4647627" y="2657231"/>
+                </a:lnTo>
+                <a:lnTo>
+                  <a:pt x="4671461" y="2657231"/>
+                </a:lnTo>
+                <a:lnTo>
+                  <a:pt x="4695295" y="2657231"/>
+                </a:lnTo>
+                <a:lnTo>
+                  <a:pt x="4719129" y="2657231"/>
+                </a:lnTo>
+                <a:lnTo>
+                  <a:pt x="4742963" y="2657231"/>
+                </a:lnTo>
+                <a:lnTo>
+                  <a:pt x="4754880" y="2657231"/>
+                </a:lnTo>
+              </a:path>
+            </a:pathLst>
+          </a:custGeom>
+          <a:noFill/>
+          <a:ln w="38100">
+            <a:solidFill>
+              <a:srgbClr val="8EDBD4"/>
+            </a:solidFill>
+          </a:ln>
+          <a:effectLst/>
+        </p:spPr>
+        <p:txBody>
+          <a:bodyPr rtlCol="0" anchor="ctr"/>
+          <a:lstStyle/>
+          <a:p>
+            <a:pPr algn="ctr"/>
+          </a:p>
+        </p:txBody>
+      </p:sp>
+      <p:sp>
+        <p:nvSpPr>
+          <p:cNvPr id="25" name="C4-E38 text 23" descr="sci-ppt:o023"/>
           <p:cNvSpPr txBox="1"/>
           <p:nvPr/>
         </p:nvSpPr>
         <p:spPr>
           <a:xfrm>
-            <a:off x="320040" y="4562856"/>
-            <a:ext cx="5715000" cy="246888"/>
+            <a:off x="3534809" y="2440744"/>
+            <a:ext cx="2011680" cy="231648"/>
           </a:xfrm>
           <a:prstGeom prst="rect">
             <a:avLst/>
@@ -3730,7 +6806,7 @@
           <a:effectLst/>
         </p:spPr>
         <p:txBody>
-          <a:bodyPr wrap="square" lIns="27432" rIns="27432" tIns="18288" bIns="18288" anchor="ctr">
+          <a:bodyPr wrap="none" lIns="18288" rIns="18288" tIns="18288" bIns="18288" anchor="t">
             <a:spAutoFit/>
           </a:bodyPr>
           <a:lstStyle/>
@@ -3741,27 +6817,59 @@
               </a:spcAft>
             </a:pPr>
             <a:r>
-              <a:rPr sz="1150" b="0" i="0">
+              <a:rPr sz="1200" b="0" i="0">
                 <a:solidFill>
-                  <a:srgbClr val="B4C7D2"/>
+                  <a:srgbClr val="E7F0F3"/>
                 </a:solidFill>
                 <a:latin typeface="Arial"/>
               </a:rPr>
-              <a:t>• G — crack energy supply</a:t>
-            </a:r>
-          </a:p>
-        </p:txBody>
-      </p:sp>
-      <p:sp>
-        <p:nvSpPr>
-          <p:cNvPr id="21" name="C4-E38 text 19" descr="sci-ppt:o019"/>
+              <a:t>Γ = ½ Tₘₐₓ δ_c</a:t>
+            </a:r>
+          </a:p>
+        </p:txBody>
+      </p:sp>
+      <p:sp>
+        <p:nvSpPr>
+          <p:cNvPr id="26" name="C4-E38 round_rect 24" descr="sci-ppt:o024"/>
+          <p:cNvSpPr/>
+          <p:nvPr/>
+        </p:nvSpPr>
+        <p:spPr>
+          <a:xfrm>
+            <a:off x="5943600" y="1371600"/>
+            <a:ext cx="5897880" cy="3474720"/>
+          </a:xfrm>
+          <a:prstGeom prst="roundRect">
+            <a:avLst/>
+          </a:prstGeom>
+          <a:solidFill>
+            <a:srgbClr val="213E4B"/>
+          </a:solidFill>
+          <a:ln w="20320">
+            <a:solidFill>
+              <a:srgbClr val="8EDBD4"/>
+            </a:solidFill>
+          </a:ln>
+          <a:effectLst/>
+        </p:spPr>
+        <p:txBody>
+          <a:bodyPr rtlCol="0" anchor="ctr"/>
+          <a:lstStyle/>
+          <a:p>
+            <a:pPr algn="ctr"/>
+          </a:p>
+        </p:txBody>
+      </p:sp>
+      <p:sp>
+        <p:nvSpPr>
+          <p:cNvPr id="27" name="C4-E38 text 25" descr="sci-ppt:o025"/>
           <p:cNvSpPr txBox="1"/>
           <p:nvPr/>
         </p:nvSpPr>
         <p:spPr>
           <a:xfrm>
-            <a:off x="6217920" y="4562856"/>
-            <a:ext cx="5715000" cy="246888"/>
+            <a:off x="6053328" y="1426464"/>
+            <a:ext cx="5678424" cy="254889"/>
           </a:xfrm>
           <a:prstGeom prst="rect">
             <a:avLst/>
@@ -3770,7 +6878,7 @@
           <a:effectLst/>
         </p:spPr>
         <p:txBody>
-          <a:bodyPr wrap="square" lIns="27432" rIns="27432" tIns="18288" bIns="18288" anchor="ctr">
+          <a:bodyPr wrap="none" lIns="18288" rIns="18288" tIns="18288" bIns="18288" anchor="t">
             <a:spAutoFit/>
           </a:bodyPr>
           <a:lstStyle/>
@@ -3781,27 +6889,27 @@
               </a:spcAft>
             </a:pPr>
             <a:r>
-              <a:rPr sz="1150" b="0" i="0">
+              <a:rPr sz="1350" b="1" i="0">
                 <a:solidFill>
-                  <a:srgbClr val="B4C7D2"/>
+                  <a:srgbClr val="8EDBD4"/>
                 </a:solidFill>
                 <a:latin typeface="Arial"/>
               </a:rPr>
-              <a:t>• ψ, T_i, v_c — actual resistance conditions</a:t>
-            </a:r>
-          </a:p>
-        </p:txBody>
-      </p:sp>
-      <p:sp>
-        <p:nvSpPr>
-          <p:cNvPr id="22" name="C4-E38 text 20" descr="sci-ppt:o020"/>
+              <a:t>Two conditions together</a:t>
+            </a:r>
+          </a:p>
+        </p:txBody>
+      </p:sp>
+      <p:sp>
+        <p:nvSpPr>
+          <p:cNvPr id="28" name="C4-E38 text 26" descr="sci-ppt:o026"/>
           <p:cNvSpPr txBox="1"/>
           <p:nvPr/>
         </p:nvSpPr>
         <p:spPr>
           <a:xfrm>
-            <a:off x="320040" y="5596128"/>
-            <a:ext cx="11430000" cy="292608"/>
+            <a:off x="6080760" y="1828800"/>
+            <a:ext cx="5669280" cy="247142"/>
           </a:xfrm>
           <a:prstGeom prst="rect">
             <a:avLst/>
@@ -3810,7 +6918,7 @@
           <a:effectLst/>
         </p:spPr>
         <p:txBody>
-          <a:bodyPr wrap="square" lIns="27432" rIns="27432" tIns="18288" bIns="18288" anchor="ctr">
+          <a:bodyPr wrap="none" lIns="18288" rIns="18288" tIns="18288" bIns="18288" anchor="t">
             <a:spAutoFit/>
           </a:bodyPr>
           <a:lstStyle/>
@@ -3821,27 +6929,27 @@
               </a:spcAft>
             </a:pPr>
             <a:r>
-              <a:rPr sz="1150" b="0" i="0">
+              <a:rPr sz="1300" b="1" i="0">
                 <a:solidFill>
-                  <a:srgbClr val="8EDBD4"/>
+                  <a:srgbClr val="E7F0F3"/>
                 </a:solidFill>
                 <a:latin typeface="Arial"/>
               </a:rPr>
-              <a:t>Reaching strength does not establish complete separation.</a:t>
-            </a:r>
-          </a:p>
-        </p:txBody>
-      </p:sp>
-      <p:sp>
-        <p:nvSpPr>
-          <p:cNvPr id="23" name="C4-E38 text 21" descr="sci-ppt:o021"/>
+              <a:t>Γ = ∫₀^δ_c tₙ dδ = ½ Tₘₐₓ δ_c</a:t>
+            </a:r>
+          </a:p>
+        </p:txBody>
+      </p:sp>
+      <p:sp>
+        <p:nvSpPr>
+          <p:cNvPr id="29" name="C4-E38 text 27" descr="sci-ppt:o027"/>
           <p:cNvSpPr txBox="1"/>
           <p:nvPr/>
         </p:nvSpPr>
         <p:spPr>
           <a:xfrm>
-            <a:off x="320040" y="6473952"/>
-            <a:ext cx="11430000" cy="256032"/>
+            <a:off x="6080760" y="2377440"/>
+            <a:ext cx="5669280" cy="247142"/>
           </a:xfrm>
           <a:prstGeom prst="rect">
             <a:avLst/>
@@ -3850,7 +6958,303 @@
           <a:effectLst/>
         </p:spPr>
         <p:txBody>
-          <a:bodyPr wrap="square" lIns="27432" rIns="27432" tIns="18288" bIns="18288" anchor="ctr">
+          <a:bodyPr wrap="none" lIns="18288" rIns="18288" tIns="18288" bIns="18288" anchor="t">
+            <a:spAutoFit/>
+          </a:bodyPr>
+          <a:lstStyle/>
+          <a:p>
+            <a:pPr algn="l">
+              <a:spcAft>
+                <a:spcPts val="0"/>
+              </a:spcAft>
+            </a:pPr>
+            <a:r>
+              <a:rPr sz="1300" b="1" i="0">
+                <a:solidFill>
+                  <a:srgbClr val="F2B880"/>
+                </a:solidFill>
+                <a:latin typeface="Arial"/>
+              </a:rPr>
+              <a:t>G ≥ Γ(ψ, Tᵢ, v_c)</a:t>
+            </a:r>
+          </a:p>
+        </p:txBody>
+      </p:sp>
+      <p:sp>
+        <p:nvSpPr>
+          <p:cNvPr id="30" name="C4-E38 text 28" descr="sci-ppt:o028"/>
+          <p:cNvSpPr txBox="1"/>
+          <p:nvPr/>
+        </p:nvSpPr>
+        <p:spPr>
+          <a:xfrm>
+            <a:off x="6281928" y="2926080"/>
+            <a:ext cx="5468112" cy="231648"/>
+          </a:xfrm>
+          <a:prstGeom prst="rect">
+            <a:avLst/>
+          </a:prstGeom>
+          <a:noFill/>
+          <a:effectLst/>
+        </p:spPr>
+        <p:txBody>
+          <a:bodyPr wrap="none" lIns="18288" rIns="18288" tIns="18288" bIns="18288" anchor="t">
+            <a:spAutoFit/>
+          </a:bodyPr>
+          <a:lstStyle/>
+          <a:p>
+            <a:pPr algn="l">
+              <a:spcAft>
+                <a:spcPts val="0"/>
+              </a:spcAft>
+            </a:pPr>
+            <a:r>
+              <a:rPr sz="1200" b="0" i="0">
+                <a:solidFill>
+                  <a:srgbClr val="E7F0F3"/>
+                </a:solidFill>
+                <a:latin typeface="Arial"/>
+              </a:rPr>
+              <a:t>Initiation: peak traction Tₘₐₓ must be reached.</a:t>
+            </a:r>
+          </a:p>
+        </p:txBody>
+      </p:sp>
+      <p:sp>
+        <p:nvSpPr>
+          <p:cNvPr id="31" name="C4-E38 ellipse 29" descr="sci-ppt:o029"/>
+          <p:cNvSpPr/>
+          <p:nvPr/>
+        </p:nvSpPr>
+        <p:spPr>
+          <a:xfrm>
+            <a:off x="6112764" y="2979420"/>
+            <a:ext cx="82296" cy="82296"/>
+          </a:xfrm>
+          <a:prstGeom prst="ellipse">
+            <a:avLst/>
+          </a:prstGeom>
+          <a:solidFill>
+            <a:srgbClr val="8EDBD4"/>
+          </a:solidFill>
+          <a:ln w="12700">
+            <a:solidFill>
+              <a:srgbClr val="8EDBD4"/>
+            </a:solidFill>
+          </a:ln>
+          <a:effectLst/>
+        </p:spPr>
+        <p:txBody>
+          <a:bodyPr rtlCol="0" anchor="ctr"/>
+          <a:lstStyle/>
+          <a:p>
+            <a:pPr algn="ctr"/>
+          </a:p>
+        </p:txBody>
+      </p:sp>
+      <p:sp>
+        <p:nvSpPr>
+          <p:cNvPr id="32" name="C4-E38 text 30" descr="sci-ppt:o030"/>
+          <p:cNvSpPr txBox="1"/>
+          <p:nvPr/>
+        </p:nvSpPr>
+        <p:spPr>
+          <a:xfrm>
+            <a:off x="6281928" y="3203448"/>
+            <a:ext cx="5468112" cy="231648"/>
+          </a:xfrm>
+          <a:prstGeom prst="rect">
+            <a:avLst/>
+          </a:prstGeom>
+          <a:noFill/>
+          <a:effectLst/>
+        </p:spPr>
+        <p:txBody>
+          <a:bodyPr wrap="none" lIns="18288" rIns="18288" tIns="18288" bIns="18288" anchor="t">
+            <a:spAutoFit/>
+          </a:bodyPr>
+          <a:lstStyle/>
+          <a:p>
+            <a:pPr algn="l">
+              <a:spcAft>
+                <a:spcPts val="0"/>
+              </a:spcAft>
+            </a:pPr>
+            <a:r>
+              <a:rPr sz="1200" b="0" i="0">
+                <a:solidFill>
+                  <a:srgbClr val="E7F0F3"/>
+                </a:solidFill>
+                <a:latin typeface="Arial"/>
+              </a:rPr>
+              <a:t>Separation: the area Γ must be supplied over the full opening δ_c.</a:t>
+            </a:r>
+          </a:p>
+        </p:txBody>
+      </p:sp>
+      <p:sp>
+        <p:nvSpPr>
+          <p:cNvPr id="33" name="C4-E38 ellipse 31" descr="sci-ppt:o031"/>
+          <p:cNvSpPr/>
+          <p:nvPr/>
+        </p:nvSpPr>
+        <p:spPr>
+          <a:xfrm>
+            <a:off x="6112764" y="3256788"/>
+            <a:ext cx="82296" cy="82296"/>
+          </a:xfrm>
+          <a:prstGeom prst="ellipse">
+            <a:avLst/>
+          </a:prstGeom>
+          <a:solidFill>
+            <a:srgbClr val="8EDBD4"/>
+          </a:solidFill>
+          <a:ln w="12700">
+            <a:solidFill>
+              <a:srgbClr val="8EDBD4"/>
+            </a:solidFill>
+          </a:ln>
+          <a:effectLst/>
+        </p:spPr>
+        <p:txBody>
+          <a:bodyPr rtlCol="0" anchor="ctr"/>
+          <a:lstStyle/>
+          <a:p>
+            <a:pPr algn="ctr"/>
+          </a:p>
+        </p:txBody>
+      </p:sp>
+      <p:sp>
+        <p:nvSpPr>
+          <p:cNvPr id="34" name="C4-E38 text 32" descr="sci-ppt:o032"/>
+          <p:cNvSpPr txBox="1"/>
+          <p:nvPr/>
+        </p:nvSpPr>
+        <p:spPr>
+          <a:xfrm>
+            <a:off x="6281928" y="3480816"/>
+            <a:ext cx="5468112" cy="231648"/>
+          </a:xfrm>
+          <a:prstGeom prst="rect">
+            <a:avLst/>
+          </a:prstGeom>
+          <a:noFill/>
+          <a:effectLst/>
+        </p:spPr>
+        <p:txBody>
+          <a:bodyPr wrap="none" lIns="18288" rIns="18288" tIns="18288" bIns="18288" anchor="t">
+            <a:spAutoFit/>
+          </a:bodyPr>
+          <a:lstStyle/>
+          <a:p>
+            <a:pPr algn="l">
+              <a:spcAft>
+                <a:spcPts val="0"/>
+              </a:spcAft>
+            </a:pPr>
+            <a:r>
+              <a:rPr sz="1200" b="0" i="0">
+                <a:solidFill>
+                  <a:srgbClr val="E7F0F3"/>
+                </a:solidFill>
+                <a:latin typeface="Arial"/>
+              </a:rPr>
+              <a:t>Both must refer to the interface that actually fails.</a:t>
+            </a:r>
+          </a:p>
+        </p:txBody>
+      </p:sp>
+      <p:sp>
+        <p:nvSpPr>
+          <p:cNvPr id="35" name="C4-E38 ellipse 33" descr="sci-ppt:o033"/>
+          <p:cNvSpPr/>
+          <p:nvPr/>
+        </p:nvSpPr>
+        <p:spPr>
+          <a:xfrm>
+            <a:off x="6112764" y="3534156"/>
+            <a:ext cx="82296" cy="82296"/>
+          </a:xfrm>
+          <a:prstGeom prst="ellipse">
+            <a:avLst/>
+          </a:prstGeom>
+          <a:solidFill>
+            <a:srgbClr val="8EDBD4"/>
+          </a:solidFill>
+          <a:ln w="12700">
+            <a:solidFill>
+              <a:srgbClr val="8EDBD4"/>
+            </a:solidFill>
+          </a:ln>
+          <a:effectLst/>
+        </p:spPr>
+        <p:txBody>
+          <a:bodyPr rtlCol="0" anchor="ctr"/>
+          <a:lstStyle/>
+          <a:p>
+            <a:pPr algn="ctr"/>
+          </a:p>
+        </p:txBody>
+      </p:sp>
+      <p:sp>
+        <p:nvSpPr>
+          <p:cNvPr id="36" name="C4-E38 text 34" descr="sci-ppt:o034"/>
+          <p:cNvSpPr txBox="1"/>
+          <p:nvPr/>
+        </p:nvSpPr>
+        <p:spPr>
+          <a:xfrm>
+            <a:off x="914400" y="5486400"/>
+            <a:ext cx="10972800" cy="239395"/>
+          </a:xfrm>
+          <a:prstGeom prst="rect">
+            <a:avLst/>
+          </a:prstGeom>
+          <a:noFill/>
+          <a:effectLst/>
+        </p:spPr>
+        <p:txBody>
+          <a:bodyPr wrap="none" lIns="18288" rIns="18288" tIns="18288" bIns="18288" anchor="t">
+            <a:spAutoFit/>
+          </a:bodyPr>
+          <a:lstStyle/>
+          <a:p>
+            <a:pPr algn="l">
+              <a:spcAft>
+                <a:spcPts val="0"/>
+              </a:spcAft>
+            </a:pPr>
+            <a:r>
+              <a:rPr sz="1250" b="0" i="0">
+                <a:solidFill>
+                  <a:srgbClr val="E7F0F3"/>
+                </a:solidFill>
+                <a:latin typeface="Arial"/>
+              </a:rPr>
+              <a:t>Defence 3: release succeeds only if both initiation and separation work are provided at the correct interface.</a:t>
+            </a:r>
+          </a:p>
+        </p:txBody>
+      </p:sp>
+      <p:sp>
+        <p:nvSpPr>
+          <p:cNvPr id="37" name="C4-E38 text 35" descr="sci-ppt:o035"/>
+          <p:cNvSpPr txBox="1"/>
+          <p:nvPr/>
+        </p:nvSpPr>
+        <p:spPr>
+          <a:xfrm>
+            <a:off x="320040" y="6510528"/>
+            <a:ext cx="11521440" cy="200660"/>
+          </a:xfrm>
+          <a:prstGeom prst="rect">
+            <a:avLst/>
+          </a:prstGeom>
+          <a:noFill/>
+          <a:effectLst/>
+        </p:spPr>
+        <p:txBody>
+          <a:bodyPr wrap="none" lIns="18288" rIns="18288" tIns="18288" bIns="18288" anchor="t">
             <a:spAutoFit/>
           </a:bodyPr>
           <a:lstStyle/>
@@ -3867,7 +7271,7 @@
                 </a:solidFill>
                 <a:latin typeface="Arial"/>
               </a:rPr>
-              <a:t>Model schematic; geometry is not to scale.</a:t>
+              <a:t>Reference formulas of the Defence 3 answer: Eqs. C4-E11, E25, E26.</a:t>
             </a:r>
           </a:p>
         </p:txBody>
